--- a/thesis/figures/design-doc/export_sheet.pptx
+++ b/thesis/figures/design-doc/export_sheet.pptx
@@ -5,13 +5,14 @@
     <p:sldMasterId id="2147483648" r:id="rId1"/>
   </p:sldMasterIdLst>
   <p:notesMasterIdLst>
-    <p:notesMasterId r:id="rId8"/>
+    <p:notesMasterId r:id="rId9"/>
   </p:notesMasterIdLst>
   <p:sldIdLst>
     <p:sldId id="256" r:id="rId4"/>
     <p:sldId id="257" r:id="rId5"/>
     <p:sldId id="258" r:id="rId6"/>
     <p:sldId id="259" r:id="rId7"/>
+    <p:sldId id="260" r:id="rId8"/>
   </p:sldIdLst>
   <p:sldSz cx="36000000" cy="18000000"/>
   <p:notesSz cx="6858000" cy="9144000"/>
@@ -137,7 +138,7 @@
       </p:grpSpPr>
       <p:sp>
         <p:nvSpPr>
-          <p:cNvPr id="481897663" name="Header Placeholder 1"/>
+          <p:cNvPr id="989490052" name="Header Placeholder 1"/>
           <p:cNvSpPr>
             <a:spLocks noGrp="1"/>
           </p:cNvSpPr>
@@ -171,7 +172,7 @@
       </p:sp>
       <p:sp>
         <p:nvSpPr>
-          <p:cNvPr id="61583777" name="Date Placeholder 2"/>
+          <p:cNvPr id="108522898" name="Date Placeholder 2"/>
           <p:cNvSpPr>
             <a:spLocks noGrp="1"/>
           </p:cNvSpPr>
@@ -209,7 +210,7 @@
       </p:sp>
       <p:sp>
         <p:nvSpPr>
-          <p:cNvPr id="573318517" name="Slide Image Placeholder 3"/>
+          <p:cNvPr id="196707358" name="Slide Image Placeholder 3"/>
           <p:cNvSpPr>
             <a:spLocks noChangeAspect="1" noGrp="1" noRot="1"/>
           </p:cNvSpPr>
@@ -245,7 +246,7 @@
       </p:sp>
       <p:sp>
         <p:nvSpPr>
-          <p:cNvPr id="1405866245" name="Notes Placeholder 4"/>
+          <p:cNvPr id="611423359" name="Notes Placeholder 4"/>
           <p:cNvSpPr>
             <a:spLocks noGrp="1"/>
           </p:cNvSpPr>
@@ -319,7 +320,7 @@
       </p:sp>
       <p:sp>
         <p:nvSpPr>
-          <p:cNvPr id="160651177" name="Footer Placeholder 5"/>
+          <p:cNvPr id="1729865101" name="Footer Placeholder 5"/>
           <p:cNvSpPr>
             <a:spLocks noGrp="1"/>
           </p:cNvSpPr>
@@ -353,7 +354,7 @@
       </p:sp>
       <p:sp>
         <p:nvSpPr>
-          <p:cNvPr id="155191345" name="Slide Number Placeholder 6"/>
+          <p:cNvPr id="589615574" name="Slide Number Placeholder 6"/>
           <p:cNvSpPr>
             <a:spLocks noGrp="1"/>
           </p:cNvSpPr>
@@ -506,99 +507,6 @@
       </p:grpSpPr>
       <p:sp>
         <p:nvSpPr>
-          <p:cNvPr id="1143403321" name="Slide Image Placeholder 1"/>
-          <p:cNvSpPr>
-            <a:spLocks noChangeAspect="1" noGrp="1" noRot="1"/>
-          </p:cNvSpPr>
-          <p:nvPr>
-            <p:ph type="sldImg"/>
-          </p:nvPr>
-        </p:nvSpPr>
-        <p:spPr bwMode="auto">
-          <a:xfrm>
-            <a:off x="685800" y="1143000"/>
-            <a:ext cx="5486400" cy="3086100"/>
-          </a:xfrm>
-        </p:spPr>
-      </p:sp>
-      <p:sp>
-        <p:nvSpPr>
-          <p:cNvPr id="551604726" name="Notes Placeholder 2"/>
-          <p:cNvSpPr>
-            <a:spLocks noGrp="1"/>
-          </p:cNvSpPr>
-          <p:nvPr>
-            <p:ph type="body" idx="1"/>
-          </p:nvPr>
-        </p:nvSpPr>
-        <p:spPr bwMode="auto"/>
-        <p:txBody>
-          <a:bodyPr/>
-          <a:lstStyle/>
-          <a:p>
-            <a:pPr>
-              <a:defRPr/>
-            </a:pPr>
-            <a:endParaRPr lang="en-US">
-              <a:latin typeface="Arial"/>
-              <a:cs typeface="Arial"/>
-            </a:endParaRPr>
-          </a:p>
-        </p:txBody>
-      </p:sp>
-      <p:sp>
-        <p:nvSpPr>
-          <p:cNvPr id="1175914285" name="Slide Number Placeholder 3"/>
-          <p:cNvSpPr>
-            <a:spLocks noGrp="1"/>
-          </p:cNvSpPr>
-          <p:nvPr>
-            <p:ph type="sldNum" sz="quarter" idx="10"/>
-          </p:nvPr>
-        </p:nvSpPr>
-        <p:spPr bwMode="auto"/>
-        <p:txBody>
-          <a:bodyPr/>
-          <a:lstStyle/>
-          <a:p>
-            <a:pPr>
-              <a:defRPr/>
-            </a:pPr>
-            <a:fld id="{2E6999B8-B6B4-4561-A3CD-BBCDAB9FC9D9}" type="slidenum">
-              <a:rPr lang="en-US"/>
-              <a:t>1</a:t>
-            </a:fld>
-            <a:endParaRPr lang="en-US"/>
-          </a:p>
-        </p:txBody>
-      </p:sp>
-    </p:spTree>
-  </p:cSld>
-  <p:clrMapOvr>
-    <a:masterClrMapping/>
-  </p:clrMapOvr>
-</p:notes>
-</file>
-
-<file path=ppt/notesSlides/notesSlide2.xml><?xml version="1.0" encoding="utf-8"?>
-<p:notes xmlns:a="http://schemas.openxmlformats.org/drawingml/2006/main" xmlns:r="http://schemas.openxmlformats.org/officeDocument/2006/relationships" xmlns:p="http://schemas.openxmlformats.org/presentationml/2006/main" xmlns:m="http://schemas.openxmlformats.org/officeDocument/2006/math" xmlns:w="http://schemas.openxmlformats.org/wordprocessingml/2006/main">
-  <p:cSld name="">
-    <p:spTree>
-      <p:nvGrpSpPr>
-        <p:cNvPr id="1" name=""/>
-        <p:cNvGrpSpPr/>
-        <p:nvPr/>
-      </p:nvGrpSpPr>
-      <p:grpSpPr bwMode="auto">
-        <a:xfrm>
-          <a:off x="0" y="0"/>
-          <a:ext cx="0" cy="0"/>
-          <a:chOff x="0" y="0"/>
-          <a:chExt cx="0" cy="0"/>
-        </a:xfrm>
-      </p:grpSpPr>
-      <p:sp>
-        <p:nvSpPr>
           <p:cNvPr id="2" name="Slide Image Placeholder 1"/>
           <p:cNvSpPr>
             <a:spLocks noChangeAspect="1" noGrp="1" noRot="1"/>
@@ -649,11 +557,104 @@
             <a:pPr>
               <a:defRPr/>
             </a:pPr>
-            <a:fld id="{6A491238-2CBC-8F49-8F2D-3518DAA56AAC}" type="slidenum">
+            <a:fld id="{CA4AF25E-8730-29A7-B21F-F2E48131D0CD}" type="slidenum">
               <a:rPr/>
               <a:t/>
             </a:fld>
             <a:endParaRPr/>
+          </a:p>
+        </p:txBody>
+      </p:sp>
+    </p:spTree>
+  </p:cSld>
+  <p:clrMapOvr>
+    <a:masterClrMapping/>
+  </p:clrMapOvr>
+</p:notes>
+</file>
+
+<file path=ppt/notesSlides/notesSlide2.xml><?xml version="1.0" encoding="utf-8"?>
+<p:notes xmlns:a="http://schemas.openxmlformats.org/drawingml/2006/main" xmlns:r="http://schemas.openxmlformats.org/officeDocument/2006/relationships" xmlns:p="http://schemas.openxmlformats.org/presentationml/2006/main" xmlns:m="http://schemas.openxmlformats.org/officeDocument/2006/math" xmlns:w="http://schemas.openxmlformats.org/wordprocessingml/2006/main">
+  <p:cSld name="">
+    <p:spTree>
+      <p:nvGrpSpPr>
+        <p:cNvPr id="1" name=""/>
+        <p:cNvGrpSpPr/>
+        <p:nvPr/>
+      </p:nvGrpSpPr>
+      <p:grpSpPr bwMode="auto">
+        <a:xfrm>
+          <a:off x="0" y="0"/>
+          <a:ext cx="0" cy="0"/>
+          <a:chOff x="0" y="0"/>
+          <a:chExt cx="0" cy="0"/>
+        </a:xfrm>
+      </p:grpSpPr>
+      <p:sp>
+        <p:nvSpPr>
+          <p:cNvPr id="1600487440" name="Slide Image Placeholder 1"/>
+          <p:cNvSpPr>
+            <a:spLocks noChangeAspect="1" noGrp="1" noRot="1"/>
+          </p:cNvSpPr>
+          <p:nvPr>
+            <p:ph type="sldImg"/>
+          </p:nvPr>
+        </p:nvSpPr>
+        <p:spPr bwMode="auto">
+          <a:xfrm>
+            <a:off x="685800" y="1143000"/>
+            <a:ext cx="5486400" cy="3086100"/>
+          </a:xfrm>
+        </p:spPr>
+      </p:sp>
+      <p:sp>
+        <p:nvSpPr>
+          <p:cNvPr id="861000315" name="Notes Placeholder 2"/>
+          <p:cNvSpPr>
+            <a:spLocks noGrp="1"/>
+          </p:cNvSpPr>
+          <p:nvPr>
+            <p:ph type="body" idx="1"/>
+          </p:nvPr>
+        </p:nvSpPr>
+        <p:spPr bwMode="auto"/>
+        <p:txBody>
+          <a:bodyPr/>
+          <a:lstStyle/>
+          <a:p>
+            <a:pPr>
+              <a:defRPr/>
+            </a:pPr>
+            <a:endParaRPr lang="en-US">
+              <a:latin typeface="Arial"/>
+              <a:cs typeface="Arial"/>
+            </a:endParaRPr>
+          </a:p>
+        </p:txBody>
+      </p:sp>
+      <p:sp>
+        <p:nvSpPr>
+          <p:cNvPr id="612845430" name="Slide Number Placeholder 3"/>
+          <p:cNvSpPr>
+            <a:spLocks noGrp="1"/>
+          </p:cNvSpPr>
+          <p:nvPr>
+            <p:ph type="sldNum" sz="quarter" idx="10"/>
+          </p:nvPr>
+        </p:nvSpPr>
+        <p:spPr bwMode="auto"/>
+        <p:txBody>
+          <a:bodyPr/>
+          <a:lstStyle/>
+          <a:p>
+            <a:pPr>
+              <a:defRPr/>
+            </a:pPr>
+            <a:fld id="{2E6999B8-B6B4-4561-A3CD-BBCDAB9FC9D9}" type="slidenum">
+              <a:rPr lang="en-US"/>
+              <a:t>1</a:t>
+            </a:fld>
+            <a:endParaRPr lang="en-US"/>
           </a:p>
         </p:txBody>
       </p:sp>
@@ -684,7 +685,7 @@
       </p:grpSpPr>
       <p:sp>
         <p:nvSpPr>
-          <p:cNvPr id="2" name="Slide Image Placeholder 1"/>
+          <p:cNvPr id="1770362583" name="Slide Image Placeholder 1"/>
           <p:cNvSpPr>
             <a:spLocks noChangeAspect="1" noGrp="1" noRot="1"/>
           </p:cNvSpPr>
@@ -696,7 +697,7 @@
       </p:sp>
       <p:sp>
         <p:nvSpPr>
-          <p:cNvPr id="3" name="Notes Placeholder 2"/>
+          <p:cNvPr id="88441044" name="Notes Placeholder 2"/>
           <p:cNvSpPr>
             <a:spLocks noGrp="1"/>
           </p:cNvSpPr>
@@ -718,7 +719,7 @@
       </p:sp>
       <p:sp>
         <p:nvSpPr>
-          <p:cNvPr id="4" name="Slide Number Placeholder 3"/>
+          <p:cNvPr id="1269979162" name="Slide Number Placeholder 3"/>
           <p:cNvSpPr>
             <a:spLocks noGrp="1"/>
           </p:cNvSpPr>
@@ -734,7 +735,7 @@
             <a:pPr>
               <a:defRPr/>
             </a:pPr>
-            <a:fld id="{6617004D-49F4-EEEE-68CD-95F7AD4965B0}" type="slidenum">
+            <a:fld id="{6A491238-2CBC-8F49-8F2D-3518DAA56AAC}" type="slidenum">
               <a:rPr/>
               <a:t/>
             </a:fld>
@@ -769,7 +770,7 @@
       </p:grpSpPr>
       <p:sp>
         <p:nvSpPr>
-          <p:cNvPr id="2" name="Slide Image Placeholder 1"/>
+          <p:cNvPr id="1225542424" name="Slide Image Placeholder 1"/>
           <p:cNvSpPr>
             <a:spLocks noChangeAspect="1" noGrp="1" noRot="1"/>
           </p:cNvSpPr>
@@ -781,7 +782,7 @@
       </p:sp>
       <p:sp>
         <p:nvSpPr>
-          <p:cNvPr id="3" name="Notes Placeholder 2"/>
+          <p:cNvPr id="957893957" name="Notes Placeholder 2"/>
           <p:cNvSpPr>
             <a:spLocks noGrp="1"/>
           </p:cNvSpPr>
@@ -803,7 +804,92 @@
       </p:sp>
       <p:sp>
         <p:nvSpPr>
-          <p:cNvPr id="4" name="Slide Number Placeholder 3"/>
+          <p:cNvPr id="1443959324" name="Slide Number Placeholder 3"/>
+          <p:cNvSpPr>
+            <a:spLocks noGrp="1"/>
+          </p:cNvSpPr>
+          <p:nvPr>
+            <p:ph type="sldNum" sz="quarter" idx="10"/>
+          </p:nvPr>
+        </p:nvSpPr>
+        <p:spPr bwMode="auto"/>
+        <p:txBody>
+          <a:bodyPr/>
+          <a:lstStyle/>
+          <a:p>
+            <a:pPr>
+              <a:defRPr/>
+            </a:pPr>
+            <a:fld id="{6617004D-49F4-EEEE-68CD-95F7AD4965B0}" type="slidenum">
+              <a:rPr/>
+              <a:t/>
+            </a:fld>
+            <a:endParaRPr/>
+          </a:p>
+        </p:txBody>
+      </p:sp>
+    </p:spTree>
+  </p:cSld>
+  <p:clrMapOvr>
+    <a:masterClrMapping/>
+  </p:clrMapOvr>
+</p:notes>
+</file>
+
+<file path=ppt/notesSlides/notesSlide5.xml><?xml version="1.0" encoding="utf-8"?>
+<p:notes xmlns:a="http://schemas.openxmlformats.org/drawingml/2006/main" xmlns:r="http://schemas.openxmlformats.org/officeDocument/2006/relationships" xmlns:p="http://schemas.openxmlformats.org/presentationml/2006/main" xmlns:m="http://schemas.openxmlformats.org/officeDocument/2006/math" xmlns:w="http://schemas.openxmlformats.org/wordprocessingml/2006/main">
+  <p:cSld name="">
+    <p:spTree>
+      <p:nvGrpSpPr>
+        <p:cNvPr id="1" name=""/>
+        <p:cNvGrpSpPr/>
+        <p:nvPr/>
+      </p:nvGrpSpPr>
+      <p:grpSpPr bwMode="auto">
+        <a:xfrm>
+          <a:off x="0" y="0"/>
+          <a:ext cx="0" cy="0"/>
+          <a:chOff x="0" y="0"/>
+          <a:chExt cx="0" cy="0"/>
+        </a:xfrm>
+      </p:grpSpPr>
+      <p:sp>
+        <p:nvSpPr>
+          <p:cNvPr id="369402624" name="Slide Image Placeholder 1"/>
+          <p:cNvSpPr>
+            <a:spLocks noChangeAspect="1" noGrp="1" noRot="1"/>
+          </p:cNvSpPr>
+          <p:nvPr>
+            <p:ph type="sldImg"/>
+          </p:nvPr>
+        </p:nvSpPr>
+        <p:spPr bwMode="auto"/>
+      </p:sp>
+      <p:sp>
+        <p:nvSpPr>
+          <p:cNvPr id="1448691931" name="Notes Placeholder 2"/>
+          <p:cNvSpPr>
+            <a:spLocks noGrp="1"/>
+          </p:cNvSpPr>
+          <p:nvPr>
+            <p:ph type="body" idx="1"/>
+          </p:nvPr>
+        </p:nvSpPr>
+        <p:spPr bwMode="auto"/>
+        <p:txBody>
+          <a:bodyPr/>
+          <a:lstStyle/>
+          <a:p>
+            <a:pPr>
+              <a:defRPr/>
+            </a:pPr>
+            <a:endParaRPr/>
+          </a:p>
+        </p:txBody>
+      </p:sp>
+      <p:sp>
+        <p:nvSpPr>
+          <p:cNvPr id="1615671367" name="Slide Number Placeholder 3"/>
           <p:cNvSpPr>
             <a:spLocks noGrp="1"/>
           </p:cNvSpPr>
@@ -854,7 +940,7 @@
       </p:grpSpPr>
       <p:sp>
         <p:nvSpPr>
-          <p:cNvPr id="768540164" name="Title 1"/>
+          <p:cNvPr id="1581975389" name="Title 1"/>
           <p:cNvSpPr>
             <a:spLocks noGrp="1"/>
           </p:cNvSpPr>
@@ -889,7 +975,7 @@
       </p:sp>
       <p:sp>
         <p:nvSpPr>
-          <p:cNvPr id="493986569" name="Subtitle 2"/>
+          <p:cNvPr id="1603253441" name="Subtitle 2"/>
           <p:cNvSpPr>
             <a:spLocks noGrp="1"/>
           </p:cNvSpPr>
@@ -957,7 +1043,7 @@
       </p:sp>
       <p:sp>
         <p:nvSpPr>
-          <p:cNvPr id="1429768719" name="Date Placeholder 3"/>
+          <p:cNvPr id="197932545" name="Date Placeholder 3"/>
           <p:cNvSpPr>
             <a:spLocks noGrp="1"/>
           </p:cNvSpPr>
@@ -983,7 +1069,7 @@
       </p:sp>
       <p:sp>
         <p:nvSpPr>
-          <p:cNvPr id="1180121410" name="Footer Placeholder 4"/>
+          <p:cNvPr id="1065514685" name="Footer Placeholder 4"/>
           <p:cNvSpPr>
             <a:spLocks noGrp="1"/>
           </p:cNvSpPr>
@@ -1005,7 +1091,7 @@
       </p:sp>
       <p:sp>
         <p:nvSpPr>
-          <p:cNvPr id="1758677085" name="Slide Number Placeholder 5"/>
+          <p:cNvPr id="233326810" name="Slide Number Placeholder 5"/>
           <p:cNvSpPr>
             <a:spLocks noGrp="1"/>
           </p:cNvSpPr>
@@ -1056,7 +1142,7 @@
       </p:grpSpPr>
       <p:sp>
         <p:nvSpPr>
-          <p:cNvPr id="642098936" name="Title 1"/>
+          <p:cNvPr id="1664121835" name="Title 1"/>
           <p:cNvSpPr>
             <a:spLocks noGrp="1"/>
           </p:cNvSpPr>
@@ -1082,7 +1168,7 @@
       </p:sp>
       <p:sp>
         <p:nvSpPr>
-          <p:cNvPr id="588431767" name="Vertical Text Placeholder 2"/>
+          <p:cNvPr id="352146508" name="Vertical Text Placeholder 2"/>
           <p:cNvSpPr>
             <a:spLocks noGrp="1"/>
           </p:cNvSpPr>
@@ -1148,7 +1234,7 @@
       </p:sp>
       <p:sp>
         <p:nvSpPr>
-          <p:cNvPr id="1902629028" name="Date Placeholder 3"/>
+          <p:cNvPr id="1315775537" name="Date Placeholder 3"/>
           <p:cNvSpPr>
             <a:spLocks noGrp="1"/>
           </p:cNvSpPr>
@@ -1174,7 +1260,7 @@
       </p:sp>
       <p:sp>
         <p:nvSpPr>
-          <p:cNvPr id="1562561249" name="Footer Placeholder 4"/>
+          <p:cNvPr id="1279757540" name="Footer Placeholder 4"/>
           <p:cNvSpPr>
             <a:spLocks noGrp="1"/>
           </p:cNvSpPr>
@@ -1196,7 +1282,7 @@
       </p:sp>
       <p:sp>
         <p:nvSpPr>
-          <p:cNvPr id="1337481607" name="Slide Number Placeholder 5"/>
+          <p:cNvPr id="1107855954" name="Slide Number Placeholder 5"/>
           <p:cNvSpPr>
             <a:spLocks noGrp="1"/>
           </p:cNvSpPr>
@@ -1247,7 +1333,7 @@
       </p:grpSpPr>
       <p:sp>
         <p:nvSpPr>
-          <p:cNvPr id="1924821255" name="Vertical Title 1"/>
+          <p:cNvPr id="1399002134" name="Vertical Title 1"/>
           <p:cNvSpPr>
             <a:spLocks noGrp="1"/>
           </p:cNvSpPr>
@@ -1278,7 +1364,7 @@
       </p:sp>
       <p:sp>
         <p:nvSpPr>
-          <p:cNvPr id="2039582789" name="Vertical Text Placeholder 2"/>
+          <p:cNvPr id="119686268" name="Vertical Text Placeholder 2"/>
           <p:cNvSpPr>
             <a:spLocks noGrp="1"/>
           </p:cNvSpPr>
@@ -1349,7 +1435,7 @@
       </p:sp>
       <p:sp>
         <p:nvSpPr>
-          <p:cNvPr id="1146730414" name="Date Placeholder 3"/>
+          <p:cNvPr id="808375681" name="Date Placeholder 3"/>
           <p:cNvSpPr>
             <a:spLocks noGrp="1"/>
           </p:cNvSpPr>
@@ -1375,7 +1461,7 @@
       </p:sp>
       <p:sp>
         <p:nvSpPr>
-          <p:cNvPr id="1565472476" name="Footer Placeholder 4"/>
+          <p:cNvPr id="2130750444" name="Footer Placeholder 4"/>
           <p:cNvSpPr>
             <a:spLocks noGrp="1"/>
           </p:cNvSpPr>
@@ -1397,7 +1483,7 @@
       </p:sp>
       <p:sp>
         <p:nvSpPr>
-          <p:cNvPr id="702003899" name="Slide Number Placeholder 5"/>
+          <p:cNvPr id="1894100580" name="Slide Number Placeholder 5"/>
           <p:cNvSpPr>
             <a:spLocks noGrp="1"/>
           </p:cNvSpPr>
@@ -1448,7 +1534,7 @@
       </p:grpSpPr>
       <p:sp>
         <p:nvSpPr>
-          <p:cNvPr id="1055525076" name="Title 1"/>
+          <p:cNvPr id="146569626" name="Title 1"/>
           <p:cNvSpPr>
             <a:spLocks noGrp="1"/>
           </p:cNvSpPr>
@@ -1474,7 +1560,7 @@
       </p:sp>
       <p:sp>
         <p:nvSpPr>
-          <p:cNvPr id="137486507" name="Content Placeholder 2"/>
+          <p:cNvPr id="1586572982" name="Content Placeholder 2"/>
           <p:cNvSpPr>
             <a:spLocks noGrp="1"/>
           </p:cNvSpPr>
@@ -1540,7 +1626,7 @@
       </p:sp>
       <p:sp>
         <p:nvSpPr>
-          <p:cNvPr id="1060672830" name="Date Placeholder 3"/>
+          <p:cNvPr id="888152181" name="Date Placeholder 3"/>
           <p:cNvSpPr>
             <a:spLocks noGrp="1"/>
           </p:cNvSpPr>
@@ -1566,7 +1652,7 @@
       </p:sp>
       <p:sp>
         <p:nvSpPr>
-          <p:cNvPr id="1637124228" name="Footer Placeholder 4"/>
+          <p:cNvPr id="1426486307" name="Footer Placeholder 4"/>
           <p:cNvSpPr>
             <a:spLocks noGrp="1"/>
           </p:cNvSpPr>
@@ -1588,7 +1674,7 @@
       </p:sp>
       <p:sp>
         <p:nvSpPr>
-          <p:cNvPr id="277143694" name="Slide Number Placeholder 5"/>
+          <p:cNvPr id="839101655" name="Slide Number Placeholder 5"/>
           <p:cNvSpPr>
             <a:spLocks noGrp="1"/>
           </p:cNvSpPr>
@@ -1639,7 +1725,7 @@
       </p:grpSpPr>
       <p:sp>
         <p:nvSpPr>
-          <p:cNvPr id="1527626049" name="Title 1"/>
+          <p:cNvPr id="418806537" name="Title 1"/>
           <p:cNvSpPr>
             <a:spLocks noGrp="1"/>
           </p:cNvSpPr>
@@ -1674,7 +1760,7 @@
       </p:sp>
       <p:sp>
         <p:nvSpPr>
-          <p:cNvPr id="320992276" name="Text Placeholder 2"/>
+          <p:cNvPr id="1387547945" name="Text Placeholder 2"/>
           <p:cNvSpPr>
             <a:spLocks noGrp="1"/>
           </p:cNvSpPr>
@@ -1796,7 +1882,7 @@
       </p:sp>
       <p:sp>
         <p:nvSpPr>
-          <p:cNvPr id="772054688" name="Date Placeholder 3"/>
+          <p:cNvPr id="1355070168" name="Date Placeholder 3"/>
           <p:cNvSpPr>
             <a:spLocks noGrp="1"/>
           </p:cNvSpPr>
@@ -1822,7 +1908,7 @@
       </p:sp>
       <p:sp>
         <p:nvSpPr>
-          <p:cNvPr id="291549955" name="Footer Placeholder 4"/>
+          <p:cNvPr id="1435219628" name="Footer Placeholder 4"/>
           <p:cNvSpPr>
             <a:spLocks noGrp="1"/>
           </p:cNvSpPr>
@@ -1844,7 +1930,7 @@
       </p:sp>
       <p:sp>
         <p:nvSpPr>
-          <p:cNvPr id="1115871985" name="Slide Number Placeholder 5"/>
+          <p:cNvPr id="1005570960" name="Slide Number Placeholder 5"/>
           <p:cNvSpPr>
             <a:spLocks noGrp="1"/>
           </p:cNvSpPr>
@@ -1895,7 +1981,7 @@
       </p:grpSpPr>
       <p:sp>
         <p:nvSpPr>
-          <p:cNvPr id="1636476527" name="Title 1"/>
+          <p:cNvPr id="1750207482" name="Title 1"/>
           <p:cNvSpPr>
             <a:spLocks noGrp="1"/>
           </p:cNvSpPr>
@@ -1921,7 +2007,7 @@
       </p:sp>
       <p:sp>
         <p:nvSpPr>
-          <p:cNvPr id="46605404" name="Content Placeholder 2"/>
+          <p:cNvPr id="1883976577" name="Content Placeholder 2"/>
           <p:cNvSpPr>
             <a:spLocks noGrp="1"/>
           </p:cNvSpPr>
@@ -1992,7 +2078,7 @@
       </p:sp>
       <p:sp>
         <p:nvSpPr>
-          <p:cNvPr id="2144247336" name="Content Placeholder 3"/>
+          <p:cNvPr id="1061840159" name="Content Placeholder 3"/>
           <p:cNvSpPr>
             <a:spLocks noGrp="1"/>
           </p:cNvSpPr>
@@ -2063,7 +2149,7 @@
       </p:sp>
       <p:sp>
         <p:nvSpPr>
-          <p:cNvPr id="1528014047" name="Date Placeholder 4"/>
+          <p:cNvPr id="608240148" name="Date Placeholder 4"/>
           <p:cNvSpPr>
             <a:spLocks noGrp="1"/>
           </p:cNvSpPr>
@@ -2089,7 +2175,7 @@
       </p:sp>
       <p:sp>
         <p:nvSpPr>
-          <p:cNvPr id="975836051" name="Footer Placeholder 5"/>
+          <p:cNvPr id="383786110" name="Footer Placeholder 5"/>
           <p:cNvSpPr>
             <a:spLocks noGrp="1"/>
           </p:cNvSpPr>
@@ -2111,7 +2197,7 @@
       </p:sp>
       <p:sp>
         <p:nvSpPr>
-          <p:cNvPr id="1476428895" name="Slide Number Placeholder 6"/>
+          <p:cNvPr id="2034283557" name="Slide Number Placeholder 6"/>
           <p:cNvSpPr>
             <a:spLocks noGrp="1"/>
           </p:cNvSpPr>
@@ -2162,7 +2248,7 @@
       </p:grpSpPr>
       <p:sp>
         <p:nvSpPr>
-          <p:cNvPr id="2037822586" name="Title 1"/>
+          <p:cNvPr id="1132756697" name="Title 1"/>
           <p:cNvSpPr>
             <a:spLocks noGrp="1"/>
           </p:cNvSpPr>
@@ -2193,7 +2279,7 @@
       </p:sp>
       <p:sp>
         <p:nvSpPr>
-          <p:cNvPr id="943595279" name="Text Placeholder 2"/>
+          <p:cNvPr id="285123502" name="Text Placeholder 2"/>
           <p:cNvSpPr>
             <a:spLocks noGrp="1"/>
           </p:cNvSpPr>
@@ -2261,7 +2347,7 @@
       </p:sp>
       <p:sp>
         <p:nvSpPr>
-          <p:cNvPr id="1009232056" name="Content Placeholder 3"/>
+          <p:cNvPr id="1105744591" name="Content Placeholder 3"/>
           <p:cNvSpPr>
             <a:spLocks noGrp="1"/>
           </p:cNvSpPr>
@@ -2332,7 +2418,7 @@
       </p:sp>
       <p:sp>
         <p:nvSpPr>
-          <p:cNvPr id="1545511547" name="Text Placeholder 4"/>
+          <p:cNvPr id="32668183" name="Text Placeholder 4"/>
           <p:cNvSpPr>
             <a:spLocks noGrp="1"/>
           </p:cNvSpPr>
@@ -2400,7 +2486,7 @@
       </p:sp>
       <p:sp>
         <p:nvSpPr>
-          <p:cNvPr id="459279495" name="Content Placeholder 5"/>
+          <p:cNvPr id="321384785" name="Content Placeholder 5"/>
           <p:cNvSpPr>
             <a:spLocks noGrp="1"/>
           </p:cNvSpPr>
@@ -2471,7 +2557,7 @@
       </p:sp>
       <p:sp>
         <p:nvSpPr>
-          <p:cNvPr id="1394947517" name="Date Placeholder 6"/>
+          <p:cNvPr id="712723994" name="Date Placeholder 6"/>
           <p:cNvSpPr>
             <a:spLocks noGrp="1"/>
           </p:cNvSpPr>
@@ -2497,7 +2583,7 @@
       </p:sp>
       <p:sp>
         <p:nvSpPr>
-          <p:cNvPr id="459904630" name="Footer Placeholder 7"/>
+          <p:cNvPr id="373078540" name="Footer Placeholder 7"/>
           <p:cNvSpPr>
             <a:spLocks noGrp="1"/>
           </p:cNvSpPr>
@@ -2519,7 +2605,7 @@
       </p:sp>
       <p:sp>
         <p:nvSpPr>
-          <p:cNvPr id="187180806" name="Slide Number Placeholder 8"/>
+          <p:cNvPr id="894237825" name="Slide Number Placeholder 8"/>
           <p:cNvSpPr>
             <a:spLocks noGrp="1"/>
           </p:cNvSpPr>
@@ -2570,7 +2656,7 @@
       </p:grpSpPr>
       <p:sp>
         <p:nvSpPr>
-          <p:cNvPr id="1107962381" name="Title 1"/>
+          <p:cNvPr id="1905245382" name="Title 1"/>
           <p:cNvSpPr>
             <a:spLocks noGrp="1"/>
           </p:cNvSpPr>
@@ -2596,7 +2682,7 @@
       </p:sp>
       <p:sp>
         <p:nvSpPr>
-          <p:cNvPr id="174833052" name="Date Placeholder 2"/>
+          <p:cNvPr id="1110659935" name="Date Placeholder 2"/>
           <p:cNvSpPr>
             <a:spLocks noGrp="1"/>
           </p:cNvSpPr>
@@ -2622,7 +2708,7 @@
       </p:sp>
       <p:sp>
         <p:nvSpPr>
-          <p:cNvPr id="1976677690" name="Footer Placeholder 3"/>
+          <p:cNvPr id="852263176" name="Footer Placeholder 3"/>
           <p:cNvSpPr>
             <a:spLocks noGrp="1"/>
           </p:cNvSpPr>
@@ -2644,7 +2730,7 @@
       </p:sp>
       <p:sp>
         <p:nvSpPr>
-          <p:cNvPr id="1051458788" name="Slide Number Placeholder 4"/>
+          <p:cNvPr id="1427261127" name="Slide Number Placeholder 4"/>
           <p:cNvSpPr>
             <a:spLocks noGrp="1"/>
           </p:cNvSpPr>
@@ -2695,7 +2781,7 @@
       </p:grpSpPr>
       <p:sp>
         <p:nvSpPr>
-          <p:cNvPr id="961185975" name="Date Placeholder 1"/>
+          <p:cNvPr id="2131839994" name="Date Placeholder 1"/>
           <p:cNvSpPr>
             <a:spLocks noGrp="1"/>
           </p:cNvSpPr>
@@ -2721,7 +2807,7 @@
       </p:sp>
       <p:sp>
         <p:nvSpPr>
-          <p:cNvPr id="1598086777" name="Footer Placeholder 2"/>
+          <p:cNvPr id="596998587" name="Footer Placeholder 2"/>
           <p:cNvSpPr>
             <a:spLocks noGrp="1"/>
           </p:cNvSpPr>
@@ -2743,7 +2829,7 @@
       </p:sp>
       <p:sp>
         <p:nvSpPr>
-          <p:cNvPr id="984079924" name="Slide Number Placeholder 3"/>
+          <p:cNvPr id="2100550223" name="Slide Number Placeholder 3"/>
           <p:cNvSpPr>
             <a:spLocks noGrp="1"/>
           </p:cNvSpPr>
@@ -2794,7 +2880,7 @@
       </p:grpSpPr>
       <p:sp>
         <p:nvSpPr>
-          <p:cNvPr id="629570738" name="Title 1"/>
+          <p:cNvPr id="631313039" name="Title 1"/>
           <p:cNvSpPr>
             <a:spLocks noGrp="1"/>
           </p:cNvSpPr>
@@ -2829,7 +2915,7 @@
       </p:sp>
       <p:sp>
         <p:nvSpPr>
-          <p:cNvPr id="458971064" name="Content Placeholder 2"/>
+          <p:cNvPr id="1370149790" name="Content Placeholder 2"/>
           <p:cNvSpPr>
             <a:spLocks noGrp="1"/>
           </p:cNvSpPr>
@@ -2928,7 +3014,7 @@
       </p:sp>
       <p:sp>
         <p:nvSpPr>
-          <p:cNvPr id="1828322399" name="Text Placeholder 3"/>
+          <p:cNvPr id="844920300" name="Text Placeholder 3"/>
           <p:cNvSpPr>
             <a:spLocks noGrp="1"/>
           </p:cNvSpPr>
@@ -2996,7 +3082,7 @@
       </p:sp>
       <p:sp>
         <p:nvSpPr>
-          <p:cNvPr id="1236407332" name="Date Placeholder 4"/>
+          <p:cNvPr id="1360914336" name="Date Placeholder 4"/>
           <p:cNvSpPr>
             <a:spLocks noGrp="1"/>
           </p:cNvSpPr>
@@ -3022,7 +3108,7 @@
       </p:sp>
       <p:sp>
         <p:nvSpPr>
-          <p:cNvPr id="1312441127" name="Footer Placeholder 5"/>
+          <p:cNvPr id="1362466399" name="Footer Placeholder 5"/>
           <p:cNvSpPr>
             <a:spLocks noGrp="1"/>
           </p:cNvSpPr>
@@ -3044,7 +3130,7 @@
       </p:sp>
       <p:sp>
         <p:nvSpPr>
-          <p:cNvPr id="2093723900" name="Slide Number Placeholder 6"/>
+          <p:cNvPr id="415157550" name="Slide Number Placeholder 6"/>
           <p:cNvSpPr>
             <a:spLocks noGrp="1"/>
           </p:cNvSpPr>
@@ -3095,7 +3181,7 @@
       </p:grpSpPr>
       <p:sp>
         <p:nvSpPr>
-          <p:cNvPr id="1550884318" name="Title 1"/>
+          <p:cNvPr id="384395154" name="Title 1"/>
           <p:cNvSpPr>
             <a:spLocks noGrp="1"/>
           </p:cNvSpPr>
@@ -3130,7 +3216,7 @@
       </p:sp>
       <p:sp>
         <p:nvSpPr>
-          <p:cNvPr id="614915088" name="Picture Placeholder 2"/>
+          <p:cNvPr id="1463655717" name="Picture Placeholder 2"/>
           <p:cNvSpPr>
             <a:spLocks noChangeAspect="1" noGrp="1"/>
           </p:cNvSpPr>
@@ -3198,7 +3284,7 @@
       </p:sp>
       <p:sp>
         <p:nvSpPr>
-          <p:cNvPr id="1149676847" name="Text Placeholder 3"/>
+          <p:cNvPr id="488842399" name="Text Placeholder 3"/>
           <p:cNvSpPr>
             <a:spLocks noGrp="1"/>
           </p:cNvSpPr>
@@ -3266,7 +3352,7 @@
       </p:sp>
       <p:sp>
         <p:nvSpPr>
-          <p:cNvPr id="313819997" name="Date Placeholder 4"/>
+          <p:cNvPr id="7017209" name="Date Placeholder 4"/>
           <p:cNvSpPr>
             <a:spLocks noGrp="1"/>
           </p:cNvSpPr>
@@ -3292,7 +3378,7 @@
       </p:sp>
       <p:sp>
         <p:nvSpPr>
-          <p:cNvPr id="1266113462" name="Footer Placeholder 5"/>
+          <p:cNvPr id="474312600" name="Footer Placeholder 5"/>
           <p:cNvSpPr>
             <a:spLocks noGrp="1"/>
           </p:cNvSpPr>
@@ -3314,7 +3400,7 @@
       </p:sp>
       <p:sp>
         <p:nvSpPr>
-          <p:cNvPr id="701395519" name="Slide Number Placeholder 6"/>
+          <p:cNvPr id="1965697959" name="Slide Number Placeholder 6"/>
           <p:cNvSpPr>
             <a:spLocks noGrp="1"/>
           </p:cNvSpPr>
@@ -3370,7 +3456,7 @@
       </p:grpSpPr>
       <p:sp>
         <p:nvSpPr>
-          <p:cNvPr id="328080913" name="Title Placeholder 1"/>
+          <p:cNvPr id="1053656005" name="Title Placeholder 1"/>
           <p:cNvSpPr>
             <a:spLocks noGrp="1"/>
           </p:cNvSpPr>
@@ -3406,7 +3492,7 @@
       </p:sp>
       <p:sp>
         <p:nvSpPr>
-          <p:cNvPr id="947879490" name="Text Placeholder 2"/>
+          <p:cNvPr id="550762257" name="Text Placeholder 2"/>
           <p:cNvSpPr>
             <a:spLocks noGrp="1"/>
           </p:cNvSpPr>
@@ -3482,7 +3568,7 @@
       </p:sp>
       <p:sp>
         <p:nvSpPr>
-          <p:cNvPr id="32388707" name="Date Placeholder 3"/>
+          <p:cNvPr id="1999633933" name="Date Placeholder 3"/>
           <p:cNvSpPr>
             <a:spLocks noGrp="1"/>
           </p:cNvSpPr>
@@ -3526,7 +3612,7 @@
       </p:sp>
       <p:sp>
         <p:nvSpPr>
-          <p:cNvPr id="616754020" name="Footer Placeholder 4"/>
+          <p:cNvPr id="97952802" name="Footer Placeholder 4"/>
           <p:cNvSpPr>
             <a:spLocks noGrp="1"/>
           </p:cNvSpPr>
@@ -3566,7 +3652,7 @@
       </p:sp>
       <p:sp>
         <p:nvSpPr>
-          <p:cNvPr id="451232688" name="Slide Number Placeholder 5"/>
+          <p:cNvPr id="2033548037" name="Slide Number Placeholder 5"/>
           <p:cNvSpPr>
             <a:spLocks noGrp="1"/>
           </p:cNvSpPr>
@@ -3924,9 +4010,1827 @@
           <a:chExt cx="0" cy="0"/>
         </a:xfrm>
       </p:grpSpPr>
+      <p:grpSp>
+        <p:nvGrpSpPr>
+          <p:cNvPr id="166638861" name=""/>
+          <p:cNvGrpSpPr/>
+          <p:nvPr/>
+        </p:nvGrpSpPr>
+        <p:grpSpPr bwMode="auto">
+          <a:xfrm>
+            <a:off x="3355306" y="3293496"/>
+            <a:ext cx="14756016" cy="4268032"/>
+            <a:chOff x="0" y="0"/>
+            <a:chExt cx="14756016" cy="4268032"/>
+          </a:xfrm>
+        </p:grpSpPr>
+        <p:grpSp>
+          <p:nvGrpSpPr>
+            <p:cNvPr id="781490164" name=""/>
+            <p:cNvGrpSpPr/>
+            <p:nvPr/>
+          </p:nvGrpSpPr>
+          <p:grpSpPr bwMode="auto">
+            <a:xfrm rot="0" flipH="0" flipV="0">
+              <a:off x="5977800" y="87809"/>
+              <a:ext cx="4539384" cy="3238569"/>
+              <a:chOff x="0" y="0"/>
+              <a:chExt cx="4539384" cy="3238569"/>
+            </a:xfrm>
+          </p:grpSpPr>
+          <p:cxnSp>
+            <p:nvCxnSpPr>
+              <p:cNvPr id="209936647" name=""/>
+              <p:cNvCxnSpPr/>
+              <p:nvPr/>
+            </p:nvCxnSpPr>
+            <p:spPr bwMode="auto">
+              <a:xfrm rot="10800000" flipH="0" flipV="0">
+                <a:off x="1769343" y="1667412"/>
+                <a:ext cx="1015142" cy="0"/>
+              </a:xfrm>
+              <a:prstGeom prst="line">
+                <a:avLst/>
+              </a:prstGeom>
+              <a:ln w="38100" cap="flat" cmpd="sng" algn="ctr">
+                <a:solidFill>
+                  <a:schemeClr val="tx1"/>
+                </a:solidFill>
+                <a:prstDash val="solid"/>
+                <a:miter lim="800000"/>
+              </a:ln>
+            </p:spPr>
+            <p:style>
+              <a:lnRef idx="1">
+                <a:schemeClr val="accent1">
+                  <a:shade val="50000"/>
+                </a:schemeClr>
+              </a:lnRef>
+              <a:fillRef idx="0">
+                <a:schemeClr val="accent1"/>
+              </a:fillRef>
+              <a:effectRef idx="0">
+                <a:schemeClr val="accent1"/>
+              </a:effectRef>
+              <a:fontRef idx="minor">
+                <a:schemeClr val="tx1"/>
+              </a:fontRef>
+            </p:style>
+          </p:cxnSp>
+          <p:grpSp>
+            <p:nvGrpSpPr>
+              <p:cNvPr id="72158560" name=""/>
+              <p:cNvGrpSpPr/>
+              <p:nvPr/>
+            </p:nvGrpSpPr>
+            <p:grpSpPr bwMode="auto">
+              <a:xfrm rot="0" flipH="0" flipV="0">
+                <a:off x="1224404" y="646337"/>
+                <a:ext cx="833436" cy="2591871"/>
+                <a:chOff x="0" y="0"/>
+                <a:chExt cx="833436" cy="2591871"/>
+              </a:xfrm>
+            </p:grpSpPr>
+            <p:sp>
+              <p:nvSpPr>
+                <p:cNvPr id="45257188" name=""/>
+                <p:cNvSpPr/>
+                <p:nvPr/>
+              </p:nvSpPr>
+              <p:spPr bwMode="auto">
+                <a:xfrm rot="0" flipH="0" flipV="0">
+                  <a:off x="288496" y="892673"/>
+                  <a:ext cx="256441" cy="256441"/>
+                </a:xfrm>
+                <a:prstGeom prst="ellipse">
+                  <a:avLst/>
+                </a:prstGeom>
+                <a:solidFill>
+                  <a:schemeClr val="tx1"/>
+                </a:solidFill>
+                <a:ln w="12700" cap="flat" cmpd="sng" algn="ctr">
+                  <a:solidFill>
+                    <a:schemeClr val="tx1"/>
+                  </a:solidFill>
+                  <a:prstDash val="solid"/>
+                  <a:miter lim="800000"/>
+                </a:ln>
+              </p:spPr>
+              <p:style>
+                <a:lnRef idx="2">
+                  <a:schemeClr val="accent1">
+                    <a:shade val="50000"/>
+                  </a:schemeClr>
+                </a:lnRef>
+                <a:fillRef idx="1">
+                  <a:schemeClr val="accent1"/>
+                </a:fillRef>
+                <a:effectRef idx="0">
+                  <a:schemeClr val="accent1"/>
+                </a:effectRef>
+                <a:fontRef idx="minor">
+                  <a:schemeClr val="lt1"/>
+                </a:fontRef>
+              </p:style>
+            </p:sp>
+            <p:cxnSp>
+              <p:nvCxnSpPr>
+                <p:cNvPr id="1485224911" name=""/>
+                <p:cNvCxnSpPr/>
+                <p:nvPr/>
+              </p:nvCxnSpPr>
+              <p:spPr bwMode="auto">
+                <a:xfrm rot="5400000" flipH="0" flipV="1">
+                  <a:off x="-36841" y="446336"/>
+                  <a:ext cx="892672" cy="0"/>
+                </a:xfrm>
+                <a:prstGeom prst="line">
+                  <a:avLst/>
+                </a:prstGeom>
+                <a:ln w="38100" cap="flat" cmpd="sng" algn="ctr">
+                  <a:solidFill>
+                    <a:schemeClr val="tx1"/>
+                  </a:solidFill>
+                  <a:prstDash val="solid"/>
+                  <a:miter lim="800000"/>
+                </a:ln>
+              </p:spPr>
+              <p:style>
+                <a:lnRef idx="1">
+                  <a:schemeClr val="accent1">
+                    <a:shade val="50000"/>
+                  </a:schemeClr>
+                </a:lnRef>
+                <a:fillRef idx="0">
+                  <a:schemeClr val="accent1"/>
+                </a:fillRef>
+                <a:effectRef idx="0">
+                  <a:schemeClr val="accent1"/>
+                </a:effectRef>
+                <a:fontRef idx="minor">
+                  <a:schemeClr val="tx1"/>
+                </a:fontRef>
+              </p:style>
+            </p:cxnSp>
+            <p:cxnSp>
+              <p:nvCxnSpPr>
+                <p:cNvPr id="1084472742" name=""/>
+                <p:cNvCxnSpPr/>
+                <p:nvPr/>
+              </p:nvCxnSpPr>
+              <p:spPr bwMode="auto">
+                <a:xfrm rot="16199998" flipH="0" flipV="0">
+                  <a:off x="40620" y="1525212"/>
+                  <a:ext cx="752193" cy="0"/>
+                </a:xfrm>
+                <a:prstGeom prst="line">
+                  <a:avLst/>
+                </a:prstGeom>
+                <a:ln w="38100" cap="flat" cmpd="sng" algn="ctr">
+                  <a:solidFill>
+                    <a:schemeClr val="tx1"/>
+                  </a:solidFill>
+                  <a:prstDash val="solid"/>
+                  <a:miter lim="800000"/>
+                </a:ln>
+              </p:spPr>
+              <p:style>
+                <a:lnRef idx="1">
+                  <a:schemeClr val="accent1">
+                    <a:shade val="50000"/>
+                  </a:schemeClr>
+                </a:lnRef>
+                <a:fillRef idx="0">
+                  <a:schemeClr val="accent1"/>
+                </a:fillRef>
+                <a:effectRef idx="0">
+                  <a:schemeClr val="accent1"/>
+                </a:effectRef>
+                <a:fontRef idx="minor">
+                  <a:schemeClr val="tx1"/>
+                </a:fontRef>
+              </p:style>
+            </p:cxnSp>
+            <p:grpSp>
+              <p:nvGrpSpPr>
+                <p:cNvPr id="965460799" name=""/>
+                <p:cNvGrpSpPr/>
+                <p:nvPr/>
+              </p:nvGrpSpPr>
+              <p:grpSpPr bwMode="auto">
+                <a:xfrm>
+                  <a:off x="0" y="1901309"/>
+                  <a:ext cx="833436" cy="690561"/>
+                  <a:chOff x="0" y="0"/>
+                  <a:chExt cx="833436" cy="690561"/>
+                </a:xfrm>
+              </p:grpSpPr>
+              <p:sp>
+                <p:nvSpPr>
+                  <p:cNvPr id="326553863" name=""/>
+                  <p:cNvSpPr txBox="1"/>
+                  <p:nvPr/>
+                </p:nvSpPr>
+                <p:spPr bwMode="auto">
+                  <a:xfrm rot="0" flipH="0" flipV="0">
+                    <a:off x="79568" y="101259"/>
+                    <a:ext cx="674658" cy="488039"/>
+                  </a:xfrm>
+                  <a:prstGeom prst="rect">
+                    <a:avLst/>
+                  </a:prstGeom>
+                  <a:noFill/>
+                </p:spPr>
+                <p:txBody>
+                  <a:bodyPr vertOverflow="overflow" horzOverflow="overflow" vert="horz" wrap="square" lIns="91440" tIns="45720" rIns="91440" bIns="45720" numCol="1" spcCol="0" rtlCol="0" fromWordArt="0" anchor="t" anchorCtr="0" forceAA="0" upright="0" compatLnSpc="0">
+                    <a:spAutoFit/>
+                  </a:bodyPr>
+                  <a:p>
+                    <a:pPr algn="ctr">
+                      <a:defRPr/>
+                    </a:pPr>
+                    <mc:AlternateContent xmlns:mc="http://schemas.openxmlformats.org/markup-compatibility/2006" xmlns:m="http://schemas.openxmlformats.org/officeDocument/2006/math">
+                      <mc:Choice xmlns:a14="http://schemas.microsoft.com/office/drawing/2010/main" Requires="a14">
+                        <a14:m>
+                          <m:oMathPara>
+                            <m:oMathParaPr/>
+                            <m:oMath>
+                              <m:sSub>
+                                <m:sSubPr>
+                                  <m:ctrlPr>
+                                    <a:rPr lang="fr-FR" sz="2600" b="1" i="1" u="none" strike="noStrike" cap="none" spc="0">
+                                      <a:solidFill>
+                                        <a:schemeClr val="tx1"/>
+                                      </a:solidFill>
+                                      <a:latin typeface="Cambria Math"/>
+                                      <a:ea typeface="Cambria Math"/>
+                                      <a:cs typeface="Cambria Math"/>
+                                    </a:rPr>
+                                  </m:ctrlPr>
+                                </m:sSubPr>
+                                <m:e>
+                                  <m:r>
+                                    <m:rPr>
+                                      <m:sty m:val="bi"/>
+                                    </m:rPr>
+                                    <a:rPr lang="fr-FR" sz="2600" u="none" strike="noStrike" cap="none" spc="0">
+                                      <a:solidFill>
+                                        <a:schemeClr val="tx1"/>
+                                      </a:solidFill>
+                                      <a:latin typeface="Cambria Math"/>
+                                      <a:ea typeface="Cambria Math"/>
+                                      <a:cs typeface="Cambria Math"/>
+                                    </a:rPr>
+                                    <m:t>M</m:t>
+                                  </m:r>
+                                </m:e>
+                                <m:sub>
+                                  <m:r>
+                                    <m:rPr>
+                                      <m:sty m:val="bi"/>
+                                    </m:rPr>
+                                    <a:rPr lang="fr-FR" sz="2600" u="none" strike="noStrike" cap="none" spc="0">
+                                      <a:solidFill>
+                                        <a:schemeClr val="tx1"/>
+                                      </a:solidFill>
+                                      <a:latin typeface="Cambria Math"/>
+                                      <a:ea typeface="Cambria Math"/>
+                                      <a:cs typeface="Cambria Math"/>
+                                    </a:rPr>
+                                    <m:t>X</m:t>
+                                  </m:r>
+                                </m:sub>
+                              </m:sSub>
+                            </m:oMath>
+                          </m:oMathPara>
+                        </a14:m>
+                      </mc:Choice>
+                      <mc:Fallback/>
+                    </mc:AlternateContent>
+                    <a:endParaRPr sz="2600" b="1">
+                      <a:latin typeface="CMU Serif"/>
+                      <a:cs typeface="CMU Serif"/>
+                    </a:endParaRPr>
+                  </a:p>
+                </p:txBody>
+              </p:sp>
+              <p:sp>
+                <p:nvSpPr>
+                  <p:cNvPr id="907833745" name=""/>
+                  <p:cNvSpPr/>
+                  <p:nvPr/>
+                </p:nvSpPr>
+                <p:spPr bwMode="auto">
+                  <a:xfrm rot="0" flipH="0" flipV="0">
+                    <a:off x="0" y="0"/>
+                    <a:ext cx="833436" cy="690561"/>
+                  </a:xfrm>
+                  <a:prstGeom prst="rect">
+                    <a:avLst/>
+                  </a:prstGeom>
+                  <a:noFill/>
+                  <a:ln w="28575" cap="flat" cmpd="sng" algn="ctr">
+                    <a:solidFill>
+                      <a:schemeClr val="tx1"/>
+                    </a:solidFill>
+                    <a:prstDash val="solid"/>
+                    <a:miter lim="800000"/>
+                  </a:ln>
+                </p:spPr>
+                <p:style>
+                  <a:lnRef idx="2">
+                    <a:schemeClr val="accent1">
+                      <a:shade val="50000"/>
+                    </a:schemeClr>
+                  </a:lnRef>
+                  <a:fillRef idx="1">
+                    <a:schemeClr val="accent1"/>
+                  </a:fillRef>
+                  <a:effectRef idx="0">
+                    <a:schemeClr val="accent1"/>
+                  </a:effectRef>
+                  <a:fontRef idx="minor">
+                    <a:schemeClr val="lt1"/>
+                  </a:fontRef>
+                </p:style>
+              </p:sp>
+            </p:grpSp>
+          </p:grpSp>
+          <p:sp>
+            <p:nvSpPr>
+              <p:cNvPr id="508684163" name=""/>
+              <p:cNvSpPr/>
+              <p:nvPr/>
+            </p:nvSpPr>
+            <p:spPr bwMode="auto">
+              <a:xfrm rot="0" flipH="0" flipV="0">
+                <a:off x="2784486" y="1539370"/>
+                <a:ext cx="256440" cy="256440"/>
+              </a:xfrm>
+              <a:prstGeom prst="ellipse">
+                <a:avLst/>
+              </a:prstGeom>
+              <a:solidFill>
+                <a:schemeClr val="tx1"/>
+              </a:solidFill>
+              <a:ln w="12700" cap="flat" cmpd="sng" algn="ctr">
+                <a:solidFill>
+                  <a:schemeClr val="tx1"/>
+                </a:solidFill>
+                <a:prstDash val="solid"/>
+                <a:miter lim="800000"/>
+              </a:ln>
+            </p:spPr>
+            <p:style>
+              <a:lnRef idx="2">
+                <a:schemeClr val="accent1">
+                  <a:shade val="50000"/>
+                </a:schemeClr>
+              </a:lnRef>
+              <a:fillRef idx="1">
+                <a:schemeClr val="accent1"/>
+              </a:fillRef>
+              <a:effectRef idx="0">
+                <a:schemeClr val="accent1"/>
+              </a:effectRef>
+              <a:fontRef idx="minor">
+                <a:schemeClr val="lt1"/>
+              </a:fontRef>
+            </p:style>
+          </p:sp>
+          <p:cxnSp>
+            <p:nvCxnSpPr>
+              <p:cNvPr id="1314814407" name=""/>
+              <p:cNvCxnSpPr/>
+              <p:nvPr/>
+            </p:nvCxnSpPr>
+            <p:spPr bwMode="auto">
+              <a:xfrm rot="5400000" flipH="0" flipV="0">
+                <a:off x="2466191" y="1092853"/>
+                <a:ext cx="893032" cy="0"/>
+              </a:xfrm>
+              <a:prstGeom prst="line">
+                <a:avLst/>
+              </a:prstGeom>
+              <a:ln w="38100" cap="flat" cmpd="sng" algn="ctr">
+                <a:solidFill>
+                  <a:schemeClr val="tx1"/>
+                </a:solidFill>
+                <a:prstDash val="solid"/>
+                <a:miter lim="800000"/>
+              </a:ln>
+            </p:spPr>
+            <p:style>
+              <a:lnRef idx="1">
+                <a:schemeClr val="accent1">
+                  <a:shade val="50000"/>
+                </a:schemeClr>
+              </a:lnRef>
+              <a:fillRef idx="0">
+                <a:schemeClr val="accent1"/>
+              </a:fillRef>
+              <a:effectRef idx="0">
+                <a:schemeClr val="accent1"/>
+              </a:effectRef>
+              <a:fontRef idx="minor">
+                <a:schemeClr val="tx1"/>
+              </a:fontRef>
+            </p:style>
+          </p:cxnSp>
+          <p:cxnSp>
+            <p:nvCxnSpPr>
+              <p:cNvPr id="38772195" name=""/>
+              <p:cNvCxnSpPr/>
+              <p:nvPr/>
+            </p:nvCxnSpPr>
+            <p:spPr bwMode="auto">
+              <a:xfrm rot="16199998" flipH="0" flipV="0">
+                <a:off x="2536610" y="2171909"/>
+                <a:ext cx="752193" cy="0"/>
+              </a:xfrm>
+              <a:prstGeom prst="line">
+                <a:avLst/>
+              </a:prstGeom>
+              <a:ln w="38100" cap="flat" cmpd="sng" algn="ctr">
+                <a:solidFill>
+                  <a:schemeClr val="tx1"/>
+                </a:solidFill>
+                <a:prstDash val="solid"/>
+                <a:miter lim="800000"/>
+              </a:ln>
+            </p:spPr>
+            <p:style>
+              <a:lnRef idx="1">
+                <a:schemeClr val="accent1">
+                  <a:shade val="50000"/>
+                </a:schemeClr>
+              </a:lnRef>
+              <a:fillRef idx="0">
+                <a:schemeClr val="accent1"/>
+              </a:fillRef>
+              <a:effectRef idx="0">
+                <a:schemeClr val="accent1"/>
+              </a:effectRef>
+              <a:fontRef idx="minor">
+                <a:schemeClr val="tx1"/>
+              </a:fontRef>
+            </p:style>
+          </p:cxnSp>
+          <p:grpSp>
+            <p:nvGrpSpPr>
+              <p:cNvPr id="1976074680" name=""/>
+              <p:cNvGrpSpPr/>
+              <p:nvPr/>
+            </p:nvGrpSpPr>
+            <p:grpSpPr bwMode="auto">
+              <a:xfrm rot="0" flipH="0" flipV="0">
+                <a:off x="2495990" y="2548008"/>
+                <a:ext cx="833436" cy="690561"/>
+                <a:chOff x="0" y="0"/>
+                <a:chExt cx="833436" cy="690561"/>
+              </a:xfrm>
+            </p:grpSpPr>
+            <p:sp>
+              <p:nvSpPr>
+                <p:cNvPr id="382696975" name=""/>
+                <p:cNvSpPr txBox="1"/>
+                <p:nvPr/>
+              </p:nvSpPr>
+              <p:spPr bwMode="auto">
+                <a:xfrm rot="0" flipH="0" flipV="0">
+                  <a:off x="79567" y="101259"/>
+                  <a:ext cx="675018" cy="488039"/>
+                </a:xfrm>
+                <a:prstGeom prst="rect">
+                  <a:avLst/>
+                </a:prstGeom>
+                <a:noFill/>
+              </p:spPr>
+              <p:txBody>
+                <a:bodyPr vertOverflow="overflow" horzOverflow="overflow" vert="horz" wrap="square" lIns="91440" tIns="45720" rIns="91440" bIns="45720" numCol="1" spcCol="0" rtlCol="0" fromWordArt="0" anchor="t" anchorCtr="0" forceAA="0" upright="0" compatLnSpc="0">
+                  <a:spAutoFit/>
+                </a:bodyPr>
+                <a:p>
+                  <a:pPr algn="ctr">
+                    <a:defRPr/>
+                  </a:pPr>
+                  <mc:AlternateContent xmlns:mc="http://schemas.openxmlformats.org/markup-compatibility/2006" xmlns:m="http://schemas.openxmlformats.org/officeDocument/2006/math">
+                    <mc:Choice xmlns:a14="http://schemas.microsoft.com/office/drawing/2010/main" Requires="a14">
+                      <a14:m>
+                        <m:oMathPara>
+                          <m:oMathParaPr/>
+                          <m:oMath>
+                            <m:sSub>
+                              <m:sSubPr>
+                                <m:ctrlPr>
+                                  <a:rPr lang="fr-FR" sz="2600" b="1" i="1" u="none" strike="noStrike" cap="none" spc="0">
+                                    <a:solidFill>
+                                      <a:schemeClr val="tx1"/>
+                                    </a:solidFill>
+                                    <a:latin typeface="Cambria Math"/>
+                                    <a:ea typeface="Cambria Math"/>
+                                    <a:cs typeface="Cambria Math"/>
+                                  </a:rPr>
+                                </m:ctrlPr>
+                              </m:sSubPr>
+                              <m:e>
+                                <m:r>
+                                  <m:rPr>
+                                    <m:sty m:val="bi"/>
+                                  </m:rPr>
+                                  <a:rPr lang="fr-FR" sz="2600" u="none" strike="noStrike" cap="none" spc="0">
+                                    <a:solidFill>
+                                      <a:schemeClr val="tx1"/>
+                                    </a:solidFill>
+                                    <a:latin typeface="Cambria Math"/>
+                                    <a:ea typeface="Cambria Math"/>
+                                    <a:cs typeface="Cambria Math"/>
+                                  </a:rPr>
+                                  <m:t>M</m:t>
+                                </m:r>
+                              </m:e>
+                              <m:sub>
+                                <m:r>
+                                  <m:rPr>
+                                    <m:sty m:val="bi"/>
+                                  </m:rPr>
+                                  <a:rPr lang="fr-FR" sz="2600" u="none" strike="noStrike" cap="none" spc="0">
+                                    <a:solidFill>
+                                      <a:schemeClr val="tx1"/>
+                                    </a:solidFill>
+                                    <a:latin typeface="Cambria Math"/>
+                                    <a:ea typeface="Cambria Math"/>
+                                    <a:cs typeface="Cambria Math"/>
+                                  </a:rPr>
+                                  <m:t>X</m:t>
+                                </m:r>
+                              </m:sub>
+                            </m:sSub>
+                          </m:oMath>
+                        </m:oMathPara>
+                      </a14:m>
+                    </mc:Choice>
+                    <mc:Fallback/>
+                  </mc:AlternateContent>
+                  <a:endParaRPr sz="2600" b="1">
+                    <a:latin typeface="CMU Serif"/>
+                    <a:cs typeface="CMU Serif"/>
+                  </a:endParaRPr>
+                </a:p>
+              </p:txBody>
+            </p:sp>
+            <p:sp>
+              <p:nvSpPr>
+                <p:cNvPr id="2122237855" name=""/>
+                <p:cNvSpPr/>
+                <p:nvPr/>
+              </p:nvSpPr>
+              <p:spPr bwMode="auto">
+                <a:xfrm rot="0" flipH="0" flipV="0">
+                  <a:off x="0" y="0"/>
+                  <a:ext cx="833436" cy="690561"/>
+                </a:xfrm>
+                <a:prstGeom prst="rect">
+                  <a:avLst/>
+                </a:prstGeom>
+                <a:noFill/>
+                <a:ln w="28575" cap="flat" cmpd="sng" algn="ctr">
+                  <a:solidFill>
+                    <a:schemeClr val="tx1"/>
+                  </a:solidFill>
+                  <a:prstDash val="solid"/>
+                  <a:miter lim="800000"/>
+                </a:ln>
+              </p:spPr>
+              <p:style>
+                <a:lnRef idx="2">
+                  <a:schemeClr val="accent1">
+                    <a:shade val="50000"/>
+                  </a:schemeClr>
+                </a:lnRef>
+                <a:fillRef idx="1">
+                  <a:schemeClr val="accent1"/>
+                </a:fillRef>
+                <a:effectRef idx="0">
+                  <a:schemeClr val="accent1"/>
+                </a:effectRef>
+                <a:fontRef idx="minor">
+                  <a:schemeClr val="lt1"/>
+                </a:fontRef>
+              </p:style>
+            </p:sp>
+          </p:grpSp>
+          <p:sp>
+            <p:nvSpPr>
+              <p:cNvPr id="1930183193" name=""/>
+              <p:cNvSpPr txBox="1"/>
+              <p:nvPr/>
+            </p:nvSpPr>
+            <p:spPr bwMode="auto">
+              <a:xfrm rot="0" flipH="0" flipV="0">
+                <a:off x="1903187" y="1203841"/>
+                <a:ext cx="678618" cy="488039"/>
+              </a:xfrm>
+              <a:prstGeom prst="rect">
+                <a:avLst/>
+              </a:prstGeom>
+              <a:noFill/>
+            </p:spPr>
+            <p:txBody>
+              <a:bodyPr vertOverflow="overflow" horzOverflow="overflow" vert="horz" wrap="square" lIns="91440" tIns="45720" rIns="91440" bIns="45720" numCol="1" spcCol="0" rtlCol="0" fromWordArt="0" anchor="t" anchorCtr="0" forceAA="0" upright="0" compatLnSpc="0">
+                <a:spAutoFit/>
+              </a:bodyPr>
+              <a:p>
+                <a:pPr algn="ctr">
+                  <a:defRPr/>
+                </a:pPr>
+                <mc:AlternateContent xmlns:mc="http://schemas.openxmlformats.org/markup-compatibility/2006" xmlns:m="http://schemas.openxmlformats.org/officeDocument/2006/math">
+                  <mc:Choice xmlns:a14="http://schemas.microsoft.com/office/drawing/2010/main" Requires="a14">
+                    <a14:m>
+                      <m:oMathPara>
+                        <m:oMathParaPr/>
+                        <m:oMath>
+                          <m:r>
+                            <m:rPr>
+                              <m:sty m:val="bi"/>
+                            </m:rPr>
+                            <a:rPr lang="fr-FR" sz="2600" u="none" strike="noStrike" cap="none" spc="0">
+                              <a:solidFill>
+                                <a:schemeClr val="tx1"/>
+                              </a:solidFill>
+                              <a:latin typeface="Cambria Math"/>
+                              <a:ea typeface="Cambria Math"/>
+                              <a:cs typeface="Cambria Math"/>
+                            </a:rPr>
+                            <m:t>CZ</m:t>
+                          </m:r>
+                        </m:oMath>
+                      </m:oMathPara>
+                    </a14:m>
+                  </mc:Choice>
+                  <mc:Fallback/>
+                </mc:AlternateContent>
+                <a:endParaRPr sz="2600" b="1">
+                  <a:latin typeface="CMU Serif"/>
+                  <a:cs typeface="CMU Serif"/>
+                </a:endParaRPr>
+              </a:p>
+            </p:txBody>
+          </p:sp>
+          <p:sp>
+            <p:nvSpPr>
+              <p:cNvPr id="1286433182" name=""/>
+              <p:cNvSpPr/>
+              <p:nvPr/>
+            </p:nvSpPr>
+            <p:spPr bwMode="auto">
+              <a:xfrm rot="0" flipH="0" flipV="0">
+                <a:off x="3893045" y="0"/>
+                <a:ext cx="646337" cy="646337"/>
+              </a:xfrm>
+              <a:prstGeom prst="ellipse">
+                <a:avLst/>
+              </a:prstGeom>
+              <a:solidFill>
+                <a:schemeClr val="bg1"/>
+              </a:solidFill>
+              <a:ln w="44450" cap="flat" cmpd="sng" algn="ctr">
+                <a:solidFill>
+                  <a:srgbClr val="000000"/>
+                </a:solidFill>
+                <a:prstDash val="sysDot"/>
+                <a:miter lim="800000"/>
+              </a:ln>
+            </p:spPr>
+            <p:style>
+              <a:lnRef idx="2">
+                <a:schemeClr val="accent1">
+                  <a:shade val="50000"/>
+                </a:schemeClr>
+              </a:lnRef>
+              <a:fillRef idx="1">
+                <a:schemeClr val="accent1"/>
+              </a:fillRef>
+              <a:effectRef idx="0">
+                <a:schemeClr val="accent1"/>
+              </a:effectRef>
+              <a:fontRef idx="minor">
+                <a:schemeClr val="lt1"/>
+              </a:fontRef>
+            </p:style>
+          </p:sp>
+          <p:cxnSp>
+            <p:nvCxnSpPr>
+              <p:cNvPr id="854316108" name=""/>
+              <p:cNvCxnSpPr/>
+              <p:nvPr/>
+            </p:nvCxnSpPr>
+            <p:spPr bwMode="auto">
+              <a:xfrm rot="10800000" flipH="0" flipV="0">
+                <a:off x="3250216" y="323168"/>
+                <a:ext cx="642827" cy="0"/>
+              </a:xfrm>
+              <a:prstGeom prst="line">
+                <a:avLst/>
+              </a:prstGeom>
+              <a:ln w="38100" cap="flat" cmpd="sng" algn="ctr">
+                <a:solidFill>
+                  <a:schemeClr val="tx1"/>
+                </a:solidFill>
+                <a:prstDash val="solid"/>
+                <a:miter lim="800000"/>
+              </a:ln>
+            </p:spPr>
+            <p:style>
+              <a:lnRef idx="1">
+                <a:schemeClr val="accent1">
+                  <a:shade val="50000"/>
+                </a:schemeClr>
+              </a:lnRef>
+              <a:fillRef idx="0">
+                <a:schemeClr val="accent1"/>
+              </a:fillRef>
+              <a:effectRef idx="0">
+                <a:schemeClr val="accent1"/>
+              </a:effectRef>
+              <a:fontRef idx="minor">
+                <a:schemeClr val="tx1"/>
+              </a:fontRef>
+            </p:style>
+          </p:cxnSp>
+          <p:sp>
+            <p:nvSpPr>
+              <p:cNvPr id="475000429" name=""/>
+              <p:cNvSpPr/>
+              <p:nvPr/>
+            </p:nvSpPr>
+            <p:spPr bwMode="auto">
+              <a:xfrm rot="0" flipH="0" flipV="0">
+                <a:off x="2589539" y="0"/>
+                <a:ext cx="646337" cy="646337"/>
+              </a:xfrm>
+              <a:prstGeom prst="ellipse">
+                <a:avLst/>
+              </a:prstGeom>
+              <a:solidFill>
+                <a:schemeClr val="bg1"/>
+              </a:solidFill>
+              <a:ln w="44450" cap="flat" cmpd="sng" algn="ctr">
+                <a:solidFill>
+                  <a:schemeClr val="tx1"/>
+                </a:solidFill>
+                <a:prstDash val="solid"/>
+                <a:miter lim="800000"/>
+              </a:ln>
+            </p:spPr>
+            <p:style>
+              <a:lnRef idx="2">
+                <a:schemeClr val="accent1">
+                  <a:shade val="50000"/>
+                </a:schemeClr>
+              </a:lnRef>
+              <a:fillRef idx="1">
+                <a:schemeClr val="accent1"/>
+              </a:fillRef>
+              <a:effectRef idx="0">
+                <a:schemeClr val="accent1"/>
+              </a:effectRef>
+              <a:fontRef idx="minor">
+                <a:schemeClr val="lt1"/>
+              </a:fontRef>
+            </p:style>
+            <p:txBody>
+              <a:bodyPr anchor="ctr"/>
+              <a:p>
+                <a:pPr algn="ctr">
+                  <a:defRPr/>
+                </a:pPr>
+                <a:endParaRPr/>
+              </a:p>
+            </p:txBody>
+          </p:sp>
+          <p:grpSp>
+            <p:nvGrpSpPr>
+              <p:cNvPr id="2083355767" name=""/>
+              <p:cNvGrpSpPr/>
+              <p:nvPr/>
+            </p:nvGrpSpPr>
+            <p:grpSpPr bwMode="auto">
+              <a:xfrm rot="10800000">
+                <a:off x="0" y="0"/>
+                <a:ext cx="1949843" cy="646337"/>
+                <a:chOff x="0" y="0"/>
+                <a:chExt cx="1949843" cy="646337"/>
+              </a:xfrm>
+            </p:grpSpPr>
+            <p:sp>
+              <p:nvSpPr>
+                <p:cNvPr id="1883425642" name=""/>
+                <p:cNvSpPr/>
+                <p:nvPr/>
+              </p:nvSpPr>
+              <p:spPr bwMode="auto">
+                <a:xfrm rot="0" flipH="0" flipV="0">
+                  <a:off x="1303506" y="0"/>
+                  <a:ext cx="646337" cy="646337"/>
+                </a:xfrm>
+                <a:prstGeom prst="ellipse">
+                  <a:avLst/>
+                </a:prstGeom>
+                <a:solidFill>
+                  <a:schemeClr val="bg1"/>
+                </a:solidFill>
+                <a:ln w="44450" cap="flat" cmpd="sng" algn="ctr">
+                  <a:solidFill>
+                    <a:srgbClr val="000000"/>
+                  </a:solidFill>
+                  <a:prstDash val="sysDot"/>
+                  <a:miter lim="800000"/>
+                </a:ln>
+              </p:spPr>
+              <p:style>
+                <a:lnRef idx="2">
+                  <a:schemeClr val="accent1">
+                    <a:shade val="50000"/>
+                  </a:schemeClr>
+                </a:lnRef>
+                <a:fillRef idx="1">
+                  <a:schemeClr val="accent1"/>
+                </a:fillRef>
+                <a:effectRef idx="0">
+                  <a:schemeClr val="accent1"/>
+                </a:effectRef>
+                <a:fontRef idx="minor">
+                  <a:schemeClr val="lt1"/>
+                </a:fontRef>
+              </p:style>
+            </p:sp>
+            <p:cxnSp>
+              <p:nvCxnSpPr>
+                <p:cNvPr id="188305902" name=""/>
+                <p:cNvCxnSpPr/>
+                <p:nvPr/>
+              </p:nvCxnSpPr>
+              <p:spPr bwMode="auto">
+                <a:xfrm rot="10800000" flipH="0" flipV="0">
+                  <a:off x="660676" y="323168"/>
+                  <a:ext cx="642827" cy="0"/>
+                </a:xfrm>
+                <a:prstGeom prst="line">
+                  <a:avLst/>
+                </a:prstGeom>
+                <a:ln w="38100" cap="flat" cmpd="sng" algn="ctr">
+                  <a:solidFill>
+                    <a:schemeClr val="tx1"/>
+                  </a:solidFill>
+                  <a:prstDash val="solid"/>
+                  <a:miter lim="800000"/>
+                </a:ln>
+              </p:spPr>
+              <p:style>
+                <a:lnRef idx="1">
+                  <a:schemeClr val="accent1">
+                    <a:shade val="50000"/>
+                  </a:schemeClr>
+                </a:lnRef>
+                <a:fillRef idx="0">
+                  <a:schemeClr val="accent1"/>
+                </a:fillRef>
+                <a:effectRef idx="0">
+                  <a:schemeClr val="accent1"/>
+                </a:effectRef>
+                <a:fontRef idx="minor">
+                  <a:schemeClr val="tx1"/>
+                </a:fontRef>
+              </p:style>
+            </p:cxnSp>
+            <p:sp>
+              <p:nvSpPr>
+                <p:cNvPr id="1505337369" name=""/>
+                <p:cNvSpPr/>
+                <p:nvPr/>
+              </p:nvSpPr>
+              <p:spPr bwMode="auto">
+                <a:xfrm rot="0" flipH="0" flipV="0">
+                  <a:off x="0" y="0"/>
+                  <a:ext cx="646337" cy="646337"/>
+                </a:xfrm>
+                <a:prstGeom prst="ellipse">
+                  <a:avLst/>
+                </a:prstGeom>
+                <a:solidFill>
+                  <a:schemeClr val="bg1"/>
+                </a:solidFill>
+                <a:ln w="44450" cap="flat" cmpd="sng" algn="ctr">
+                  <a:solidFill>
+                    <a:schemeClr val="tx1"/>
+                  </a:solidFill>
+                  <a:prstDash val="solid"/>
+                  <a:miter lim="800000"/>
+                </a:ln>
+              </p:spPr>
+              <p:style>
+                <a:lnRef idx="2">
+                  <a:schemeClr val="accent1">
+                    <a:shade val="50000"/>
+                  </a:schemeClr>
+                </a:lnRef>
+                <a:fillRef idx="1">
+                  <a:schemeClr val="accent1"/>
+                </a:fillRef>
+                <a:effectRef idx="0">
+                  <a:schemeClr val="accent1"/>
+                </a:effectRef>
+                <a:fontRef idx="minor">
+                  <a:schemeClr val="lt1"/>
+                </a:fontRef>
+              </p:style>
+              <p:txBody>
+                <a:bodyPr anchor="ctr"/>
+                <a:p>
+                  <a:pPr algn="ctr">
+                    <a:defRPr/>
+                  </a:pPr>
+                  <a:endParaRPr/>
+                </a:p>
+              </p:txBody>
+            </p:sp>
+          </p:grpSp>
+        </p:grpSp>
+        <p:grpSp>
+          <p:nvGrpSpPr>
+            <p:cNvPr id="562520318" name=""/>
+            <p:cNvGrpSpPr/>
+            <p:nvPr/>
+          </p:nvGrpSpPr>
+          <p:grpSpPr bwMode="auto">
+            <a:xfrm rot="0" flipH="0" flipV="0">
+              <a:off x="232392" y="660861"/>
+              <a:ext cx="4194556" cy="1400662"/>
+              <a:chOff x="0" y="0"/>
+              <a:chExt cx="4194556" cy="1400662"/>
+            </a:xfrm>
+          </p:grpSpPr>
+          <p:sp>
+            <p:nvSpPr>
+              <p:cNvPr id="915773653" name=""/>
+              <p:cNvSpPr/>
+              <p:nvPr/>
+            </p:nvSpPr>
+            <p:spPr bwMode="auto">
+              <a:xfrm rot="0" flipH="0" flipV="0">
+                <a:off x="1289166" y="652275"/>
+                <a:ext cx="646337" cy="646337"/>
+              </a:xfrm>
+              <a:prstGeom prst="ellipse">
+                <a:avLst/>
+              </a:prstGeom>
+              <a:solidFill>
+                <a:schemeClr val="bg1"/>
+              </a:solidFill>
+              <a:ln w="44450" cap="flat" cmpd="sng" algn="ctr">
+                <a:solidFill>
+                  <a:schemeClr val="tx1"/>
+                </a:solidFill>
+                <a:prstDash val="solid"/>
+                <a:miter lim="800000"/>
+              </a:ln>
+            </p:spPr>
+            <p:style>
+              <a:lnRef idx="2">
+                <a:schemeClr val="accent1">
+                  <a:shade val="50000"/>
+                </a:schemeClr>
+              </a:lnRef>
+              <a:fillRef idx="1">
+                <a:schemeClr val="accent1"/>
+              </a:fillRef>
+              <a:effectRef idx="0">
+                <a:schemeClr val="accent1"/>
+              </a:effectRef>
+              <a:fontRef idx="minor">
+                <a:schemeClr val="lt1"/>
+              </a:fontRef>
+            </p:style>
+          </p:sp>
+          <p:sp>
+            <p:nvSpPr>
+              <p:cNvPr id="1295666278" name=""/>
+              <p:cNvSpPr/>
+              <p:nvPr/>
+            </p:nvSpPr>
+            <p:spPr bwMode="auto">
+              <a:xfrm rot="0" flipH="0" flipV="0">
+                <a:off x="1136909" y="536992"/>
+                <a:ext cx="1898305" cy="863669"/>
+              </a:xfrm>
+              <a:prstGeom prst="flowChartAlternateProcess">
+                <a:avLst/>
+              </a:prstGeom>
+              <a:noFill/>
+              <a:ln w="57150" cap="flat" cmpd="sng" algn="ctr">
+                <a:solidFill>
+                  <a:schemeClr val="tx1"/>
+                </a:solidFill>
+                <a:prstDash val="dash"/>
+                <a:miter lim="800000"/>
+              </a:ln>
+            </p:spPr>
+            <p:style>
+              <a:lnRef idx="2">
+                <a:schemeClr val="accent1">
+                  <a:shade val="50000"/>
+                </a:schemeClr>
+              </a:lnRef>
+              <a:fillRef idx="1">
+                <a:schemeClr val="accent1"/>
+              </a:fillRef>
+              <a:effectRef idx="0">
+                <a:schemeClr val="accent1"/>
+              </a:effectRef>
+              <a:fontRef idx="minor">
+                <a:schemeClr val="lt1"/>
+              </a:fontRef>
+            </p:style>
+            <p:txBody>
+              <a:bodyPr anchor="ctr"/>
+              <a:p>
+                <a:pPr algn="ctr">
+                  <a:defRPr/>
+                </a:pPr>
+                <a:endParaRPr/>
+              </a:p>
+            </p:txBody>
+          </p:sp>
+          <p:sp>
+            <p:nvSpPr>
+              <p:cNvPr id="399993644" name=""/>
+              <p:cNvSpPr txBox="1"/>
+              <p:nvPr/>
+            </p:nvSpPr>
+            <p:spPr bwMode="auto">
+              <a:xfrm rot="0" flipH="0" flipV="0">
+                <a:off x="1095301" y="0"/>
+                <a:ext cx="1983323" cy="488039"/>
+              </a:xfrm>
+              <a:prstGeom prst="rect">
+                <a:avLst/>
+              </a:prstGeom>
+              <a:noFill/>
+            </p:spPr>
+            <p:txBody>
+              <a:bodyPr vertOverflow="overflow" horzOverflow="overflow" vert="horz" wrap="square" lIns="91440" tIns="45720" rIns="91440" bIns="45720" numCol="1" spcCol="0" rtlCol="0" fromWordArt="0" anchor="t" anchorCtr="0" forceAA="0" upright="0" compatLnSpc="0">
+                <a:spAutoFit/>
+              </a:bodyPr>
+              <a:p>
+                <a:pPr algn="ctr">
+                  <a:defRPr/>
+                </a:pPr>
+                <a:r>
+                  <a:rPr lang="fr-FR" sz="2600" b="1">
+                    <a:latin typeface="CMU Serif"/>
+                    <a:ea typeface="CMU Serif"/>
+                    <a:cs typeface="CMU Serif"/>
+                  </a:rPr>
+                  <a:t>BSM</a:t>
+                </a:r>
+                <a:endParaRPr sz="2600" b="1">
+                  <a:latin typeface="CMU Serif"/>
+                  <a:cs typeface="CMU Serif"/>
+                </a:endParaRPr>
+              </a:p>
+            </p:txBody>
+          </p:sp>
+          <p:cxnSp>
+            <p:nvCxnSpPr>
+              <p:cNvPr id="1745280508" name=""/>
+              <p:cNvCxnSpPr/>
+              <p:nvPr/>
+            </p:nvCxnSpPr>
+            <p:spPr bwMode="auto">
+              <a:xfrm rot="10800000" flipH="0" flipV="0">
+                <a:off x="646336" y="975444"/>
+                <a:ext cx="642828" cy="0"/>
+              </a:xfrm>
+              <a:prstGeom prst="line">
+                <a:avLst/>
+              </a:prstGeom>
+              <a:ln w="38100" cap="flat" cmpd="sng" algn="ctr">
+                <a:solidFill>
+                  <a:schemeClr val="tx1"/>
+                </a:solidFill>
+                <a:prstDash val="solid"/>
+                <a:miter lim="800000"/>
+              </a:ln>
+            </p:spPr>
+            <p:style>
+              <a:lnRef idx="1">
+                <a:schemeClr val="accent1">
+                  <a:shade val="50000"/>
+                </a:schemeClr>
+              </a:lnRef>
+              <a:fillRef idx="0">
+                <a:schemeClr val="accent1"/>
+              </a:fillRef>
+              <a:effectRef idx="0">
+                <a:schemeClr val="accent1"/>
+              </a:effectRef>
+              <a:fontRef idx="minor">
+                <a:schemeClr val="tx1"/>
+              </a:fontRef>
+            </p:style>
+          </p:cxnSp>
+          <p:sp>
+            <p:nvSpPr>
+              <p:cNvPr id="403892996" name=""/>
+              <p:cNvSpPr/>
+              <p:nvPr/>
+            </p:nvSpPr>
+            <p:spPr bwMode="auto">
+              <a:xfrm rot="0" flipH="0" flipV="0">
+                <a:off x="0" y="652275"/>
+                <a:ext cx="646337" cy="646337"/>
+              </a:xfrm>
+              <a:prstGeom prst="ellipse">
+                <a:avLst/>
+              </a:prstGeom>
+              <a:solidFill>
+                <a:schemeClr val="bg1"/>
+              </a:solidFill>
+              <a:ln w="44450" cap="flat" cmpd="sng" algn="ctr">
+                <a:solidFill>
+                  <a:srgbClr val="000000"/>
+                </a:solidFill>
+                <a:prstDash val="sysDot"/>
+                <a:miter lim="800000"/>
+              </a:ln>
+            </p:spPr>
+            <p:style>
+              <a:lnRef idx="2">
+                <a:schemeClr val="accent1">
+                  <a:shade val="50000"/>
+                </a:schemeClr>
+              </a:lnRef>
+              <a:fillRef idx="1">
+                <a:schemeClr val="accent1"/>
+              </a:fillRef>
+              <a:effectRef idx="0">
+                <a:schemeClr val="accent1"/>
+              </a:effectRef>
+              <a:fontRef idx="minor">
+                <a:schemeClr val="lt1"/>
+              </a:fontRef>
+            </p:style>
+            <p:txBody>
+              <a:bodyPr anchor="ctr"/>
+              <a:p>
+                <a:pPr algn="ctr">
+                  <a:defRPr/>
+                </a:pPr>
+                <a:endParaRPr/>
+              </a:p>
+            </p:txBody>
+          </p:sp>
+          <p:sp>
+            <p:nvSpPr>
+              <p:cNvPr id="1816905699" name=""/>
+              <p:cNvSpPr/>
+              <p:nvPr/>
+            </p:nvSpPr>
+            <p:spPr bwMode="auto">
+              <a:xfrm rot="0" flipH="0" flipV="0">
+                <a:off x="3548218" y="652275"/>
+                <a:ext cx="646337" cy="646337"/>
+              </a:xfrm>
+              <a:prstGeom prst="ellipse">
+                <a:avLst/>
+              </a:prstGeom>
+              <a:solidFill>
+                <a:schemeClr val="bg1"/>
+              </a:solidFill>
+              <a:ln w="44450" cap="flat" cmpd="sng" algn="ctr">
+                <a:solidFill>
+                  <a:srgbClr val="000000"/>
+                </a:solidFill>
+                <a:prstDash val="sysDot"/>
+                <a:miter lim="800000"/>
+              </a:ln>
+            </p:spPr>
+            <p:style>
+              <a:lnRef idx="2">
+                <a:schemeClr val="accent1">
+                  <a:shade val="50000"/>
+                </a:schemeClr>
+              </a:lnRef>
+              <a:fillRef idx="1">
+                <a:schemeClr val="accent1"/>
+              </a:fillRef>
+              <a:effectRef idx="0">
+                <a:schemeClr val="accent1"/>
+              </a:effectRef>
+              <a:fontRef idx="minor">
+                <a:schemeClr val="lt1"/>
+              </a:fontRef>
+            </p:style>
+          </p:sp>
+          <p:cxnSp>
+            <p:nvCxnSpPr>
+              <p:cNvPr id="2111305849" name=""/>
+              <p:cNvCxnSpPr/>
+              <p:nvPr/>
+            </p:nvCxnSpPr>
+            <p:spPr bwMode="auto">
+              <a:xfrm rot="10800000" flipH="0" flipV="0">
+                <a:off x="2905389" y="975444"/>
+                <a:ext cx="642827" cy="0"/>
+              </a:xfrm>
+              <a:prstGeom prst="line">
+                <a:avLst/>
+              </a:prstGeom>
+              <a:ln w="38100" cap="flat" cmpd="sng" algn="ctr">
+                <a:solidFill>
+                  <a:schemeClr val="tx1"/>
+                </a:solidFill>
+                <a:prstDash val="solid"/>
+                <a:miter lim="800000"/>
+              </a:ln>
+            </p:spPr>
+            <p:style>
+              <a:lnRef idx="1">
+                <a:schemeClr val="accent1">
+                  <a:shade val="50000"/>
+                </a:schemeClr>
+              </a:lnRef>
+              <a:fillRef idx="0">
+                <a:schemeClr val="accent1"/>
+              </a:fillRef>
+              <a:effectRef idx="0">
+                <a:schemeClr val="accent1"/>
+              </a:effectRef>
+              <a:fontRef idx="minor">
+                <a:schemeClr val="tx1"/>
+              </a:fontRef>
+            </p:style>
+          </p:cxnSp>
+          <p:sp>
+            <p:nvSpPr>
+              <p:cNvPr id="35204925" name=""/>
+              <p:cNvSpPr/>
+              <p:nvPr/>
+            </p:nvSpPr>
+            <p:spPr bwMode="auto">
+              <a:xfrm rot="0" flipH="0" flipV="0">
+                <a:off x="2259051" y="652275"/>
+                <a:ext cx="646337" cy="646337"/>
+              </a:xfrm>
+              <a:prstGeom prst="ellipse">
+                <a:avLst/>
+              </a:prstGeom>
+              <a:solidFill>
+                <a:schemeClr val="bg1"/>
+              </a:solidFill>
+              <a:ln w="44450" cap="flat" cmpd="sng" algn="ctr">
+                <a:solidFill>
+                  <a:schemeClr val="tx1"/>
+                </a:solidFill>
+                <a:prstDash val="solid"/>
+                <a:miter lim="800000"/>
+              </a:ln>
+            </p:spPr>
+            <p:style>
+              <a:lnRef idx="2">
+                <a:schemeClr val="accent1">
+                  <a:shade val="50000"/>
+                </a:schemeClr>
+              </a:lnRef>
+              <a:fillRef idx="1">
+                <a:schemeClr val="accent1"/>
+              </a:fillRef>
+              <a:effectRef idx="0">
+                <a:schemeClr val="accent1"/>
+              </a:effectRef>
+              <a:fontRef idx="minor">
+                <a:schemeClr val="lt1"/>
+              </a:fontRef>
+            </p:style>
+            <p:txBody>
+              <a:bodyPr anchor="ctr"/>
+              <a:p>
+                <a:pPr algn="ctr">
+                  <a:defRPr/>
+                </a:pPr>
+                <a:endParaRPr/>
+              </a:p>
+            </p:txBody>
+          </p:sp>
+        </p:grpSp>
+        <p:cxnSp>
+          <p:nvCxnSpPr>
+            <p:cNvPr id="1143848607" name=""/>
+            <p:cNvCxnSpPr/>
+            <p:nvPr/>
+          </p:nvCxnSpPr>
+          <p:spPr bwMode="auto">
+            <a:xfrm rot="0" flipH="0" flipV="0">
+              <a:off x="5006027" y="1651483"/>
+              <a:ext cx="1463752" cy="368"/>
+            </a:xfrm>
+            <a:prstGeom prst="line">
+              <a:avLst/>
+            </a:prstGeom>
+            <a:ln w="38100" cap="flat" cmpd="sng" algn="ctr">
+              <a:solidFill>
+                <a:srgbClr val="00FF73"/>
+              </a:solidFill>
+              <a:prstDash val="solid"/>
+              <a:miter lim="800000"/>
+              <a:tailEnd type="arrow" len="med"/>
+            </a:ln>
+          </p:spPr>
+          <p:style>
+            <a:lnRef idx="1">
+              <a:schemeClr val="accent1">
+                <a:shade val="50000"/>
+              </a:schemeClr>
+            </a:lnRef>
+            <a:fillRef idx="0">
+              <a:schemeClr val="accent1"/>
+            </a:fillRef>
+            <a:effectRef idx="0">
+              <a:schemeClr val="accent1"/>
+            </a:effectRef>
+            <a:fontRef idx="minor">
+              <a:schemeClr val="tx1"/>
+            </a:fontRef>
+          </p:style>
+        </p:cxnSp>
+        <p:sp>
+          <p:nvSpPr>
+            <p:cNvPr id="1345250975" name=""/>
+            <p:cNvSpPr txBox="1"/>
+            <p:nvPr/>
+          </p:nvSpPr>
+          <p:spPr bwMode="auto">
+            <a:xfrm rot="0" flipH="0" flipV="0">
+              <a:off x="5006027" y="1104617"/>
+              <a:ext cx="1432661" cy="488039"/>
+            </a:xfrm>
+            <a:prstGeom prst="rect">
+              <a:avLst/>
+            </a:prstGeom>
+            <a:noFill/>
+          </p:spPr>
+          <p:txBody>
+            <a:bodyPr vertOverflow="overflow" horzOverflow="overflow" vert="horz" wrap="square" lIns="91440" tIns="45720" rIns="91440" bIns="45720" numCol="1" spcCol="0" rtlCol="0" fromWordArt="0" anchor="t" anchorCtr="0" forceAA="0" upright="0" compatLnSpc="0">
+              <a:spAutoFit/>
+            </a:bodyPr>
+            <a:p>
+              <a:pPr algn="ctr">
+                <a:defRPr/>
+              </a:pPr>
+              <a:r>
+                <a:rPr lang="fr-FR" sz="2600" b="1">
+                  <a:solidFill>
+                    <a:srgbClr val="00FF73"/>
+                  </a:solidFill>
+                  <a:latin typeface="CMU Serif"/>
+                  <a:ea typeface="CMU Serif"/>
+                  <a:cs typeface="CMU Serif"/>
+                </a:rPr>
+                <a:t>Success</a:t>
+              </a:r>
+              <a:endParaRPr sz="2600" b="1">
+                <a:solidFill>
+                  <a:srgbClr val="00FF73"/>
+                </a:solidFill>
+                <a:latin typeface="CMU Serif"/>
+                <a:cs typeface="CMU Serif"/>
+              </a:endParaRPr>
+            </a:p>
+          </p:txBody>
+        </p:sp>
+        <p:sp>
+          <p:nvSpPr>
+            <p:cNvPr id="155905261" name=""/>
+            <p:cNvSpPr txBox="1"/>
+            <p:nvPr/>
+          </p:nvSpPr>
+          <p:spPr bwMode="auto">
+            <a:xfrm rot="0" flipH="0" flipV="0">
+              <a:off x="10029595" y="1214224"/>
+              <a:ext cx="1435540" cy="823320"/>
+            </a:xfrm>
+            <a:prstGeom prst="rect">
+              <a:avLst/>
+            </a:prstGeom>
+            <a:noFill/>
+          </p:spPr>
+          <p:txBody>
+            <a:bodyPr vertOverflow="overflow" horzOverflow="overflow" vert="horz" wrap="square" lIns="91440" tIns="45720" rIns="91440" bIns="45720" numCol="1" spcCol="0" rtlCol="0" fromWordArt="0" anchor="t" anchorCtr="0" forceAA="0" upright="0" compatLnSpc="0">
+              <a:spAutoFit/>
+            </a:bodyPr>
+            <a:p>
+              <a:pPr algn="ctr">
+                <a:defRPr/>
+              </a:pPr>
+              <a:r>
+                <a:rPr lang="fr-FR" sz="4800" b="1">
+                  <a:solidFill>
+                    <a:schemeClr val="tx1"/>
+                  </a:solidFill>
+                  <a:latin typeface="CMU Serif"/>
+                  <a:ea typeface="CMU Serif"/>
+                  <a:cs typeface="CMU Serif"/>
+                </a:rPr>
+                <a:t>=</a:t>
+              </a:r>
+              <a:endParaRPr sz="4800" b="1">
+                <a:solidFill>
+                  <a:schemeClr val="tx1"/>
+                </a:solidFill>
+                <a:latin typeface="CMU Serif"/>
+                <a:cs typeface="CMU Serif"/>
+              </a:endParaRPr>
+            </a:p>
+          </p:txBody>
+        </p:sp>
+        <p:grpSp>
+          <p:nvGrpSpPr>
+            <p:cNvPr id="1284129151" name=""/>
+            <p:cNvGrpSpPr/>
+            <p:nvPr/>
+          </p:nvGrpSpPr>
+          <p:grpSpPr bwMode="auto">
+            <a:xfrm rot="0" flipH="0" flipV="0">
+              <a:off x="11565070" y="1302715"/>
+              <a:ext cx="2713758" cy="646338"/>
+              <a:chOff x="0" y="0"/>
+              <a:chExt cx="2713758" cy="646338"/>
+            </a:xfrm>
+          </p:grpSpPr>
+          <p:sp>
+            <p:nvSpPr>
+              <p:cNvPr id="542542561" name=""/>
+              <p:cNvSpPr/>
+              <p:nvPr/>
+            </p:nvSpPr>
+            <p:spPr bwMode="auto">
+              <a:xfrm rot="0" flipH="0" flipV="0">
+                <a:off x="2067420" y="0"/>
+                <a:ext cx="646337" cy="646337"/>
+              </a:xfrm>
+              <a:prstGeom prst="ellipse">
+                <a:avLst/>
+              </a:prstGeom>
+              <a:solidFill>
+                <a:schemeClr val="bg1"/>
+              </a:solidFill>
+              <a:ln w="44450" cap="flat" cmpd="sng" algn="ctr">
+                <a:solidFill>
+                  <a:srgbClr val="000000"/>
+                </a:solidFill>
+                <a:prstDash val="sysDot"/>
+                <a:miter lim="800000"/>
+              </a:ln>
+            </p:spPr>
+            <p:style>
+              <a:lnRef idx="2">
+                <a:schemeClr val="accent1">
+                  <a:shade val="50000"/>
+                </a:schemeClr>
+              </a:lnRef>
+              <a:fillRef idx="1">
+                <a:schemeClr val="accent1"/>
+              </a:fillRef>
+              <a:effectRef idx="0">
+                <a:schemeClr val="accent1"/>
+              </a:effectRef>
+              <a:fontRef idx="minor">
+                <a:schemeClr val="lt1"/>
+              </a:fontRef>
+            </p:style>
+          </p:sp>
+          <p:sp>
+            <p:nvSpPr>
+              <p:cNvPr id="390393671" name=""/>
+              <p:cNvSpPr/>
+              <p:nvPr/>
+            </p:nvSpPr>
+            <p:spPr bwMode="auto">
+              <a:xfrm rot="10800000" flipH="0" flipV="0">
+                <a:off x="0" y="0"/>
+                <a:ext cx="646337" cy="646337"/>
+              </a:xfrm>
+              <a:prstGeom prst="ellipse">
+                <a:avLst/>
+              </a:prstGeom>
+              <a:solidFill>
+                <a:schemeClr val="bg1"/>
+              </a:solidFill>
+              <a:ln w="44450" cap="flat" cmpd="sng" algn="ctr">
+                <a:solidFill>
+                  <a:srgbClr val="000000"/>
+                </a:solidFill>
+                <a:prstDash val="sysDot"/>
+                <a:miter lim="800000"/>
+              </a:ln>
+            </p:spPr>
+            <p:style>
+              <a:lnRef idx="2">
+                <a:schemeClr val="accent1">
+                  <a:shade val="50000"/>
+                </a:schemeClr>
+              </a:lnRef>
+              <a:fillRef idx="1">
+                <a:schemeClr val="accent1"/>
+              </a:fillRef>
+              <a:effectRef idx="0">
+                <a:schemeClr val="accent1"/>
+              </a:effectRef>
+              <a:fontRef idx="minor">
+                <a:schemeClr val="lt1"/>
+              </a:fontRef>
+            </p:style>
+          </p:sp>
+          <p:cxnSp>
+            <p:nvCxnSpPr>
+              <p:cNvPr id="798033775" name=""/>
+              <p:cNvCxnSpPr/>
+              <p:nvPr/>
+            </p:nvCxnSpPr>
+            <p:spPr bwMode="auto">
+              <a:xfrm rot="10800000" flipH="0" flipV="0">
+                <a:off x="646337" y="323169"/>
+                <a:ext cx="1421082" cy="0"/>
+              </a:xfrm>
+              <a:prstGeom prst="line">
+                <a:avLst/>
+              </a:prstGeom>
+              <a:ln w="57150" cap="flat" cmpd="sng" algn="ctr">
+                <a:solidFill>
+                  <a:srgbClr val="00FF73"/>
+                </a:solidFill>
+                <a:prstDash val="solid"/>
+                <a:miter lim="800000"/>
+              </a:ln>
+            </p:spPr>
+            <p:style>
+              <a:lnRef idx="1">
+                <a:schemeClr val="accent1">
+                  <a:shade val="50000"/>
+                </a:schemeClr>
+              </a:lnRef>
+              <a:fillRef idx="0">
+                <a:schemeClr val="accent1"/>
+              </a:fillRef>
+              <a:effectRef idx="0">
+                <a:schemeClr val="accent1"/>
+              </a:effectRef>
+              <a:fontRef idx="minor">
+                <a:schemeClr val="tx1"/>
+              </a:fontRef>
+            </p:style>
+          </p:cxnSp>
+        </p:grpSp>
+        <p:sp>
+          <p:nvSpPr>
+            <p:cNvPr id="904782835" name=""/>
+            <p:cNvSpPr txBox="1"/>
+            <p:nvPr/>
+          </p:nvSpPr>
+          <p:spPr bwMode="auto">
+            <a:xfrm rot="0" flipH="0" flipV="0">
+              <a:off x="13783654" y="2245463"/>
+              <a:ext cx="647699" cy="366119"/>
+            </a:xfrm>
+            <a:prstGeom prst="rect">
+              <a:avLst/>
+            </a:prstGeom>
+            <a:noFill/>
+          </p:spPr>
+          <p:txBody>
+            <a:bodyPr vertOverflow="overflow" horzOverflow="overflow" vert="horz" wrap="square" lIns="91440" tIns="45720" rIns="91440" bIns="45720" numCol="1" spcCol="0" rtlCol="0" fromWordArt="0" anchor="t" anchorCtr="0" forceAA="0" upright="0" compatLnSpc="0">
+              <a:spAutoFit/>
+            </a:bodyPr>
+            <a:p>
+              <a:pPr>
+                <a:defRPr/>
+              </a:pPr>
+              <a:endParaRPr/>
+            </a:p>
+          </p:txBody>
+        </p:sp>
+        <p:sp>
+          <p:nvSpPr>
+            <p:cNvPr id="1413467146" name=""/>
+            <p:cNvSpPr txBox="1"/>
+            <p:nvPr/>
+          </p:nvSpPr>
+          <p:spPr bwMode="auto">
+            <a:xfrm rot="0" flipH="0" flipV="0">
+              <a:off x="10801350" y="0"/>
+              <a:ext cx="648059" cy="366119"/>
+            </a:xfrm>
+            <a:prstGeom prst="rect">
+              <a:avLst/>
+            </a:prstGeom>
+            <a:noFill/>
+          </p:spPr>
+          <p:txBody>
+            <a:bodyPr vertOverflow="overflow" horzOverflow="overflow" vert="horz" wrap="square" lIns="91440" tIns="45720" rIns="91440" bIns="45720" numCol="1" spcCol="0" rtlCol="0" fromWordArt="0" anchor="t" anchorCtr="0" forceAA="0" upright="0" compatLnSpc="0">
+              <a:spAutoFit/>
+            </a:bodyPr>
+            <a:p>
+              <a:pPr>
+                <a:defRPr/>
+              </a:pPr>
+              <a:endParaRPr/>
+            </a:p>
+          </p:txBody>
+        </p:sp>
+        <p:sp>
+          <p:nvSpPr>
+            <p:cNvPr id="1136975868" name=""/>
+            <p:cNvSpPr txBox="1"/>
+            <p:nvPr/>
+          </p:nvSpPr>
+          <p:spPr bwMode="auto">
+            <a:xfrm rot="0" flipH="0" flipV="0">
+              <a:off x="0" y="781049"/>
+              <a:ext cx="648419" cy="366119"/>
+            </a:xfrm>
+            <a:prstGeom prst="rect">
+              <a:avLst/>
+            </a:prstGeom>
+            <a:noFill/>
+          </p:spPr>
+          <p:txBody>
+            <a:bodyPr vertOverflow="overflow" horzOverflow="overflow" vert="horz" wrap="square" lIns="91440" tIns="45720" rIns="91440" bIns="45720" numCol="1" spcCol="0" rtlCol="0" fromWordArt="0" anchor="t" anchorCtr="0" forceAA="0" upright="0" compatLnSpc="0">
+              <a:spAutoFit/>
+            </a:bodyPr>
+            <a:p>
+              <a:pPr>
+                <a:defRPr/>
+              </a:pPr>
+              <a:endParaRPr/>
+            </a:p>
+          </p:txBody>
+        </p:sp>
+        <p:sp>
+          <p:nvSpPr>
+            <p:cNvPr id="2011420539" name=""/>
+            <p:cNvSpPr txBox="1"/>
+            <p:nvPr/>
+          </p:nvSpPr>
+          <p:spPr bwMode="auto">
+            <a:xfrm rot="0" flipH="0" flipV="0">
+              <a:off x="396496" y="2708029"/>
+              <a:ext cx="3731407" cy="457559"/>
+            </a:xfrm>
+            <a:prstGeom prst="rect">
+              <a:avLst/>
+            </a:prstGeom>
+            <a:noFill/>
+          </p:spPr>
+          <p:txBody>
+            <a:bodyPr vertOverflow="overflow" horzOverflow="overflow" vert="horz" wrap="square" lIns="91440" tIns="45720" rIns="91440" bIns="45720" numCol="1" spcCol="0" rtlCol="0" fromWordArt="0" anchor="t" anchorCtr="0" forceAA="0" upright="0" compatLnSpc="0">
+              <a:spAutoFit/>
+            </a:bodyPr>
+            <a:p>
+              <a:pPr marL="327935" indent="-327935" algn="ctr">
+                <a:buAutoNum type="alphaLcParenBoth"/>
+                <a:defRPr/>
+              </a:pPr>
+              <a:r>
+                <a:rPr lang="fr-FR" sz="2400" b="0">
+                  <a:latin typeface="CMU Serif"/>
+                  <a:ea typeface="CMU Serif"/>
+                  <a:cs typeface="CMU Serif"/>
+                </a:rPr>
+                <a:t> XXXXXXXXXXXXX</a:t>
+              </a:r>
+              <a:endParaRPr sz="2400" b="0" i="0">
+                <a:latin typeface="CMU Serif"/>
+                <a:cs typeface="CMU Serif"/>
+              </a:endParaRPr>
+            </a:p>
+          </p:txBody>
+        </p:sp>
+        <p:sp>
+          <p:nvSpPr>
+            <p:cNvPr id="1324314389" name=""/>
+            <p:cNvSpPr txBox="1"/>
+            <p:nvPr/>
+          </p:nvSpPr>
+          <p:spPr bwMode="auto">
+            <a:xfrm rot="0" flipH="0" flipV="0">
+              <a:off x="6344582" y="3810472"/>
+              <a:ext cx="3805819" cy="457559"/>
+            </a:xfrm>
+            <a:prstGeom prst="rect">
+              <a:avLst/>
+            </a:prstGeom>
+            <a:noFill/>
+          </p:spPr>
+          <p:txBody>
+            <a:bodyPr vertOverflow="overflow" horzOverflow="overflow" vert="horz" wrap="square" lIns="91440" tIns="45720" rIns="91440" bIns="45720" numCol="1" spcCol="0" rtlCol="0" fromWordArt="0" anchor="t" anchorCtr="0" forceAA="0" upright="0" compatLnSpc="0">
+              <a:spAutoFit/>
+            </a:bodyPr>
+            <a:p>
+              <a:pPr algn="ctr">
+                <a:defRPr/>
+              </a:pPr>
+              <a:r>
+                <a:rPr lang="fr-FR" sz="2400" b="0">
+                  <a:latin typeface="CMU Serif"/>
+                  <a:ea typeface="CMU Serif"/>
+                  <a:cs typeface="CMU Serif"/>
+                </a:rPr>
+                <a:t>(b) XXXXXXXXXXXXX</a:t>
+              </a:r>
+              <a:endParaRPr sz="2400" b="0" i="0">
+                <a:latin typeface="CMU Serif"/>
+                <a:cs typeface="CMU Serif"/>
+              </a:endParaRPr>
+            </a:p>
+          </p:txBody>
+        </p:sp>
+        <p:sp>
+          <p:nvSpPr>
+            <p:cNvPr id="296880483" name=""/>
+            <p:cNvSpPr txBox="1"/>
+            <p:nvPr/>
+          </p:nvSpPr>
+          <p:spPr bwMode="auto">
+            <a:xfrm rot="0" flipH="0" flipV="0">
+              <a:off x="10950196" y="2708029"/>
+              <a:ext cx="3805819" cy="457559"/>
+            </a:xfrm>
+            <a:prstGeom prst="rect">
+              <a:avLst/>
+            </a:prstGeom>
+            <a:noFill/>
+          </p:spPr>
+          <p:txBody>
+            <a:bodyPr vertOverflow="overflow" horzOverflow="overflow" vert="horz" wrap="square" lIns="91440" tIns="45720" rIns="91440" bIns="45720" numCol="1" spcCol="0" rtlCol="0" fromWordArt="0" anchor="t" anchorCtr="0" forceAA="0" upright="0" compatLnSpc="0">
+              <a:spAutoFit/>
+            </a:bodyPr>
+            <a:p>
+              <a:pPr algn="ctr">
+                <a:defRPr/>
+              </a:pPr>
+              <a:r>
+                <a:rPr lang="fr-FR" sz="2400" b="0">
+                  <a:latin typeface="CMU Serif"/>
+                  <a:ea typeface="CMU Serif"/>
+                  <a:cs typeface="CMU Serif"/>
+                </a:rPr>
+                <a:t>(c) XXXXXXXXXXXXX</a:t>
+              </a:r>
+              <a:endParaRPr sz="2400" b="0" i="0">
+                <a:latin typeface="CMU Serif"/>
+                <a:cs typeface="CMU Serif"/>
+              </a:endParaRPr>
+            </a:p>
+          </p:txBody>
+        </p:sp>
+      </p:grpSp>
+    </p:spTree>
+  </p:cSld>
+  <p:clrMapOvr>
+    <a:masterClrMapping/>
+  </p:clrMapOvr>
+  <mc:AlternateContent xmlns:mc="http://schemas.openxmlformats.org/markup-compatibility/2006">
+    <mc:Choice xmlns:p159="http://schemas.microsoft.com/office/powerpoint/2015/09/main" xmlns:p14="http://schemas.microsoft.com/office/powerpoint/2010/main" Requires="p159">
+      <p:transition p14:dur="500" advClick="1"/>
+    </mc:Choice>
+    <mc:Fallback>
+      <p:transition advClick="1"/>
+    </mc:Fallback>
+  </mc:AlternateContent>
+</p:sld>
+</file>
+
+<file path=ppt/slides/slide2.xml><?xml version="1.0" encoding="utf-8"?>
+<p:sld xmlns:a="http://schemas.openxmlformats.org/drawingml/2006/main" xmlns:r="http://schemas.openxmlformats.org/officeDocument/2006/relationships" xmlns:p="http://schemas.openxmlformats.org/presentationml/2006/main" xmlns:m="http://schemas.openxmlformats.org/officeDocument/2006/math" xmlns:w="http://schemas.openxmlformats.org/wordprocessingml/2006/main" xmlns:mc="http://schemas.openxmlformats.org/markup-compatibility/2006" showMasterPhAnim="0" showMasterSp="1" show="1">
+  <p:cSld name="">
+    <p:spTree>
+      <p:nvGrpSpPr>
+        <p:cNvPr id="1" name=""/>
+        <p:cNvGrpSpPr/>
+        <p:nvPr/>
+      </p:nvGrpSpPr>
+      <p:grpSpPr bwMode="auto">
+        <a:xfrm>
+          <a:off x="0" y="0"/>
+          <a:ext cx="0" cy="0"/>
+          <a:chOff x="0" y="0"/>
+          <a:chExt cx="0" cy="0"/>
+        </a:xfrm>
+      </p:grpSpPr>
       <p:sp>
         <p:nvSpPr>
-          <p:cNvPr id="977948193" name=""/>
+          <p:cNvPr id="686022993" name=""/>
           <p:cNvSpPr txBox="1"/>
           <p:nvPr/>
         </p:nvSpPr>
@@ -3958,7 +5862,7 @@
       </p:sp>
       <p:grpSp>
         <p:nvGrpSpPr>
-          <p:cNvPr id="260786662" name=""/>
+          <p:cNvPr id="1220503517" name=""/>
           <p:cNvGrpSpPr/>
           <p:nvPr/>
         </p:nvGrpSpPr>
@@ -4020,7 +5924,7 @@
                 </p:nvCxnSpPr>
                 <p:spPr bwMode="auto">
                   <a:xfrm rot="10800000" flipH="0" flipV="0">
-                    <a:off x="2436300" y="1668754"/>
+                    <a:off x="2436300" y="1668753"/>
                     <a:ext cx="805230" cy="0"/>
                   </a:xfrm>
                   <a:prstGeom prst="line">
@@ -4711,7 +6615,7 @@
               <p:spPr bwMode="auto">
                 <a:xfrm rot="5400000" flipH="0" flipV="0">
                   <a:off x="2878668" y="3254228"/>
-                  <a:ext cx="668324" cy="640440"/>
+                  <a:ext cx="668323" cy="640440"/>
                 </a:xfrm>
                 <a:prstGeom prst="rect">
                   <a:avLst/>
@@ -4876,7 +6780,7 @@
                   </p:nvCxnSpPr>
                   <p:spPr bwMode="auto">
                     <a:xfrm rot="10800000" flipH="0" flipV="0">
-                      <a:off x="2436301" y="1668755"/>
+                      <a:off x="2436300" y="1668755"/>
                       <a:ext cx="805230" cy="0"/>
                     </a:xfrm>
                     <a:prstGeom prst="line">
@@ -4993,7 +6897,7 @@
                   </p:nvSpPr>
                   <p:spPr bwMode="auto">
                     <a:xfrm rot="0" flipH="0" flipV="0">
-                      <a:off x="3241531" y="1302410"/>
+                      <a:off x="3241531" y="1302409"/>
                       <a:ext cx="732690" cy="732690"/>
                     </a:xfrm>
                     <a:prstGeom prst="ellipse">
@@ -5647,7 +7551,7 @@
                   </p:nvCxnSpPr>
                   <p:spPr bwMode="auto">
                     <a:xfrm rot="10800000" flipH="0" flipV="1">
-                      <a:off x="732690" y="1668754"/>
+                      <a:off x="732690" y="1668753"/>
                       <a:ext cx="970920" cy="0"/>
                     </a:xfrm>
                     <a:prstGeom prst="line">
@@ -6321,7 +8225,7 @@
               <p:spPr bwMode="auto">
                 <a:xfrm rot="5400000" flipH="0" flipV="0">
                   <a:off x="7907794" y="2055617"/>
-                  <a:ext cx="668324" cy="640440"/>
+                  <a:ext cx="668323" cy="640440"/>
                 </a:xfrm>
                 <a:prstGeom prst="rect">
                   <a:avLst/>
@@ -6463,7 +8367,7 @@
       </p:grpSp>
       <p:grpSp>
         <p:nvGrpSpPr>
-          <p:cNvPr id="52375456" name=""/>
+          <p:cNvPr id="922680047" name=""/>
           <p:cNvGrpSpPr/>
           <p:nvPr/>
         </p:nvGrpSpPr>
@@ -6539,7 +8443,7 @@
             </p:nvSpPr>
             <p:spPr bwMode="auto">
               <a:xfrm rot="5400000" flipH="0" flipV="0">
-                <a:off x="7332505" y="-480656"/>
+                <a:off x="7332505" y="-480655"/>
                 <a:ext cx="220570" cy="3187350"/>
               </a:xfrm>
               <a:prstGeom prst="leftBrace">
@@ -8335,7 +10239,7 @@
               <p:spPr bwMode="auto">
                 <a:xfrm rot="16199998" flipH="0" flipV="1">
                   <a:off x="2399672" y="2042691"/>
-                  <a:ext cx="318812" cy="240180"/>
+                  <a:ext cx="318811" cy="240180"/>
                 </a:xfrm>
                 <a:prstGeom prst="line">
                   <a:avLst/>
@@ -8374,7 +10278,7 @@
               <p:spPr bwMode="auto">
                 <a:xfrm rot="16199998" flipH="0" flipV="0">
                   <a:off x="1722248" y="2055617"/>
-                  <a:ext cx="318812" cy="214327"/>
+                  <a:ext cx="318811" cy="214327"/>
                 </a:xfrm>
                 <a:prstGeom prst="line">
                   <a:avLst/>
@@ -8548,7 +10452,7 @@
               <p:spPr bwMode="auto">
                 <a:xfrm rot="16199998" flipH="0" flipV="1">
                   <a:off x="4105413" y="2042693"/>
-                  <a:ext cx="318813" cy="240179"/>
+                  <a:ext cx="318813" cy="240178"/>
                 </a:xfrm>
                 <a:prstGeom prst="line">
                   <a:avLst/>
@@ -8587,7 +10491,7 @@
               <p:spPr bwMode="auto">
                 <a:xfrm rot="16199998" flipH="0" flipV="0">
                   <a:off x="3427990" y="2055617"/>
-                  <a:ext cx="318812" cy="214327"/>
+                  <a:ext cx="318811" cy="214327"/>
                 </a:xfrm>
                 <a:prstGeom prst="line">
                   <a:avLst/>
@@ -8752,7 +10656,7 @@
               <p:spPr bwMode="auto">
                 <a:xfrm rot="16199998" flipH="0" flipV="1">
                   <a:off x="5811154" y="2059828"/>
-                  <a:ext cx="318813" cy="240179"/>
+                  <a:ext cx="318813" cy="240178"/>
                 </a:xfrm>
                 <a:prstGeom prst="line">
                   <a:avLst/>
@@ -8791,7 +10695,7 @@
               <p:spPr bwMode="auto">
                 <a:xfrm rot="16199998" flipH="0" flipV="0">
                   <a:off x="5133731" y="2072753"/>
-                  <a:ext cx="318812" cy="214327"/>
+                  <a:ext cx="318811" cy="214327"/>
                 </a:xfrm>
                 <a:prstGeom prst="line">
                   <a:avLst/>
@@ -8997,7 +10901,7 @@
               </p:nvSpPr>
               <p:spPr bwMode="auto">
                 <a:xfrm rot="10800000" flipH="0" flipV="0">
-                  <a:off x="5772334" y="3281848"/>
+                  <a:off x="5772333" y="3281848"/>
                   <a:ext cx="636631" cy="636631"/>
                 </a:xfrm>
                 <a:prstGeom prst="ellipse">
@@ -9237,7 +11141,7 @@
               </p:nvCxnSpPr>
               <p:spPr bwMode="auto">
                 <a:xfrm rot="16199998" flipH="0" flipV="0">
-                  <a:off x="5033030" y="3128902"/>
+                  <a:off x="5033029" y="3128902"/>
                   <a:ext cx="305884" cy="0"/>
                 </a:xfrm>
                 <a:prstGeom prst="line">
@@ -10211,7 +12115,7 @@
 </p:sld>
 </file>
 
-<file path=ppt/slides/slide2.xml><?xml version="1.0" encoding="utf-8"?>
+<file path=ppt/slides/slide3.xml><?xml version="1.0" encoding="utf-8"?>
 <p:sld xmlns:a="http://schemas.openxmlformats.org/drawingml/2006/main" xmlns:r="http://schemas.openxmlformats.org/officeDocument/2006/relationships" xmlns:p="http://schemas.openxmlformats.org/presentationml/2006/main" xmlns:m="http://schemas.openxmlformats.org/officeDocument/2006/math" xmlns:w="http://schemas.openxmlformats.org/wordprocessingml/2006/main" xmlns:mc="http://schemas.openxmlformats.org/markup-compatibility/2006" showMasterPhAnim="0" showMasterSp="1" show="1">
   <p:cSld name="">
     <p:spTree>
@@ -10230,14 +12134,14 @@
       </p:grpSpPr>
       <p:sp>
         <p:nvSpPr>
-          <p:cNvPr id="48205205" name=""/>
+          <p:cNvPr id="444946359" name=""/>
           <p:cNvSpPr txBox="1"/>
           <p:nvPr/>
         </p:nvSpPr>
         <p:spPr bwMode="auto">
           <a:xfrm rot="0" flipH="0" flipV="0">
-            <a:off x="19402263" y="7705999"/>
-            <a:ext cx="7482848" cy="2834999"/>
+            <a:off x="19402262" y="7705999"/>
+            <a:ext cx="7482847" cy="2834999"/>
           </a:xfrm>
           <a:prstGeom prst="rect">
             <a:avLst/>
@@ -10262,7 +12166,7 @@
       </p:sp>
       <p:grpSp>
         <p:nvGrpSpPr>
-          <p:cNvPr id="1600563470" name=""/>
+          <p:cNvPr id="1941266647" name=""/>
           <p:cNvGrpSpPr/>
           <p:nvPr/>
         </p:nvGrpSpPr>
@@ -13395,7 +15299,7 @@
                   <p:spPr bwMode="auto">
                     <a:xfrm rot="10800000" flipH="0" flipV="1">
                       <a:off x="298031" y="174582"/>
-                      <a:ext cx="587376" cy="406440"/>
+                      <a:ext cx="587376" cy="406439"/>
                     </a:xfrm>
                     <a:prstGeom prst="line">
                       <a:avLst/>
@@ -15378,7 +17282,7 @@
               </p:nvSpPr>
               <p:spPr bwMode="auto">
                 <a:xfrm rot="5400000" flipH="0" flipV="0">
-                  <a:off x="4887607" y="27638"/>
+                  <a:off x="4887606" y="27638"/>
                   <a:ext cx="421396" cy="366119"/>
                 </a:xfrm>
                 <a:prstGeom prst="rect">
@@ -15579,7 +17483,7 @@
             </p:nvSpPr>
             <p:spPr bwMode="auto">
               <a:xfrm rot="0" flipH="0" flipV="0">
-                <a:off x="1104970" y="48749"/>
+                <a:off x="1104970" y="48748"/>
                 <a:ext cx="2366127" cy="366119"/>
               </a:xfrm>
               <a:prstGeom prst="rect">
@@ -16170,9 +18074,9 @@
                   <p:grpSpPr bwMode="auto">
                     <a:xfrm>
                       <a:off x="2248848" y="0"/>
-                      <a:ext cx="3461325" cy="1408941"/>
+                      <a:ext cx="3461324" cy="1408941"/>
                       <a:chOff x="0" y="0"/>
-                      <a:chExt cx="3461325" cy="1408941"/>
+                      <a:chExt cx="3461324" cy="1408941"/>
                     </a:xfrm>
                   </p:grpSpPr>
                   <p:grpSp>
@@ -18429,9 +20333,9 @@
                   <p:grpSpPr bwMode="auto">
                     <a:xfrm rot="10800000">
                       <a:off x="5905530" y="0"/>
-                      <a:ext cx="3461325" cy="1408941"/>
+                      <a:ext cx="3461324" cy="1408941"/>
                       <a:chOff x="0" y="0"/>
-                      <a:chExt cx="3461325" cy="1408941"/>
+                      <a:chExt cx="3461324" cy="1408941"/>
                     </a:xfrm>
                   </p:grpSpPr>
                   <p:grpSp>
@@ -20107,7 +22011,7 @@
               </p:nvSpPr>
               <p:spPr bwMode="auto">
                 <a:xfrm rot="16199998" flipH="0" flipV="0">
-                  <a:off x="3458140" y="66456"/>
+                  <a:off x="3458139" y="66456"/>
                   <a:ext cx="422474" cy="366119"/>
                 </a:xfrm>
                 <a:prstGeom prst="rect">
@@ -20190,7 +22094,7 @@
 </p:sld>
 </file>
 
-<file path=ppt/slides/slide3.xml><?xml version="1.0" encoding="utf-8"?>
+<file path=ppt/slides/slide4.xml><?xml version="1.0" encoding="utf-8"?>
 <p:sld xmlns:a="http://schemas.openxmlformats.org/drawingml/2006/main" xmlns:r="http://schemas.openxmlformats.org/officeDocument/2006/relationships" xmlns:p="http://schemas.openxmlformats.org/presentationml/2006/main" xmlns:m="http://schemas.openxmlformats.org/officeDocument/2006/math" xmlns:w="http://schemas.openxmlformats.org/wordprocessingml/2006/main" xmlns:mc="http://schemas.openxmlformats.org/markup-compatibility/2006" showMasterPhAnim="0" showMasterSp="1" show="1">
   <p:cSld name="">
     <p:spTree>
@@ -20209,7 +22113,7 @@
       </p:grpSpPr>
       <p:sp>
         <p:nvSpPr>
-          <p:cNvPr id="956312239" name=""/>
+          <p:cNvPr id="235907454" name=""/>
           <p:cNvSpPr txBox="1"/>
           <p:nvPr/>
         </p:nvSpPr>
@@ -20249,7 +22153,7 @@
       </p:sp>
       <p:grpSp>
         <p:nvGrpSpPr>
-          <p:cNvPr id="1582091978" name=""/>
+          <p:cNvPr id="1005204020" name=""/>
           <p:cNvGrpSpPr/>
           <p:nvPr/>
         </p:nvGrpSpPr>
@@ -20297,7 +22201,7 @@
               </p:nvCxnSpPr>
               <p:spPr bwMode="auto">
                 <a:xfrm rot="10800000" flipH="0" flipV="0">
-                  <a:off x="2436300" y="1668754"/>
+                  <a:off x="2436300" y="1668753"/>
                   <a:ext cx="805230" cy="0"/>
                 </a:xfrm>
                 <a:prstGeom prst="line">
@@ -20856,7 +22760,7 @@
             </p:nvGrpSpPr>
             <p:grpSpPr bwMode="auto">
               <a:xfrm>
-                <a:off x="943678" y="0"/>
+                <a:off x="943677" y="0"/>
                 <a:ext cx="3924297" cy="1066377"/>
                 <a:chOff x="0" y="0"/>
                 <a:chExt cx="3924297" cy="1066377"/>
@@ -21153,7 +23057,7 @@
                 </p:nvCxnSpPr>
                 <p:spPr bwMode="auto">
                   <a:xfrm rot="10800000" flipH="0" flipV="0">
-                    <a:off x="2436301" y="1668755"/>
+                    <a:off x="2436300" y="1668755"/>
                     <a:ext cx="805230" cy="0"/>
                   </a:xfrm>
                   <a:prstGeom prst="line">
@@ -21270,7 +23174,7 @@
                 </p:nvSpPr>
                 <p:spPr bwMode="auto">
                   <a:xfrm rot="0" flipH="0" flipV="0">
-                    <a:off x="3241531" y="1302410"/>
+                    <a:off x="3241531" y="1302409"/>
                     <a:ext cx="732690" cy="732690"/>
                   </a:xfrm>
                   <a:prstGeom prst="ellipse">
@@ -21924,7 +23828,7 @@
                 </p:nvCxnSpPr>
                 <p:spPr bwMode="auto">
                   <a:xfrm rot="10800000" flipH="0" flipV="1">
-                    <a:off x="732690" y="1668754"/>
+                    <a:off x="732690" y="1668753"/>
                     <a:ext cx="970920" cy="0"/>
                   </a:xfrm>
                   <a:prstGeom prst="line">
@@ -22387,7 +24291,7 @@
             <p:spPr bwMode="auto">
               <a:xfrm rot="0" flipH="0" flipV="0">
                 <a:off x="4239348" y="118238"/>
-                <a:ext cx="795422" cy="518519"/>
+                <a:ext cx="795421" cy="518519"/>
               </a:xfrm>
               <a:prstGeom prst="rect">
                 <a:avLst/>
@@ -22685,7 +24589,7 @@
 </p:sld>
 </file>
 
-<file path=ppt/slides/slide4.xml><?xml version="1.0" encoding="utf-8"?>
+<file path=ppt/slides/slide5.xml><?xml version="1.0" encoding="utf-8"?>
 <p:sld xmlns:a="http://schemas.openxmlformats.org/drawingml/2006/main" xmlns:r="http://schemas.openxmlformats.org/officeDocument/2006/relationships" xmlns:p="http://schemas.openxmlformats.org/presentationml/2006/main" xmlns:m="http://schemas.openxmlformats.org/officeDocument/2006/math" xmlns:w="http://schemas.openxmlformats.org/wordprocessingml/2006/main" xmlns:mc="http://schemas.openxmlformats.org/markup-compatibility/2006" showMasterPhAnim="0" showMasterSp="1" show="1">
   <p:cSld name="">
     <p:spTree>
@@ -22704,7 +24608,7 @@
       </p:grpSpPr>
       <p:grpSp>
         <p:nvGrpSpPr>
-          <p:cNvPr id="1001554855" name=""/>
+          <p:cNvPr id="1003193316" name=""/>
           <p:cNvGrpSpPr/>
           <p:nvPr/>
         </p:nvGrpSpPr>
@@ -23485,7 +25389,7 @@
           <p:spPr bwMode="auto">
             <a:xfrm rot="5400000" flipH="0" flipV="0">
               <a:off x="2244835" y="1877466"/>
-              <a:ext cx="377915" cy="640440"/>
+              <a:ext cx="377914" cy="640440"/>
             </a:xfrm>
             <a:prstGeom prst="rect">
               <a:avLst/>
@@ -23619,16 +25523,16 @@
       </p:grpSp>
       <p:grpSp>
         <p:nvGrpSpPr>
-          <p:cNvPr id="670852984" name=""/>
+          <p:cNvPr id="324489406" name=""/>
           <p:cNvGrpSpPr/>
           <p:nvPr/>
         </p:nvGrpSpPr>
         <p:grpSpPr bwMode="auto">
           <a:xfrm flipH="0" flipV="0">
             <a:off x="5951362" y="8493231"/>
-            <a:ext cx="6072366" cy="2708724"/>
+            <a:ext cx="6072365" cy="2708724"/>
             <a:chOff x="0" y="0"/>
-            <a:chExt cx="6072366" cy="2708724"/>
+            <a:chExt cx="6072365" cy="2708724"/>
           </a:xfrm>
         </p:grpSpPr>
         <p:grpSp>
@@ -23640,9 +25544,9 @@
           <p:grpSpPr bwMode="auto">
             <a:xfrm flipH="0" flipV="0">
               <a:off x="0" y="0"/>
-              <a:ext cx="6072366" cy="2708724"/>
+              <a:ext cx="6072365" cy="2708724"/>
               <a:chOff x="0" y="0"/>
-              <a:chExt cx="6072366" cy="2708724"/>
+              <a:chExt cx="6072365" cy="2708724"/>
             </a:xfrm>
           </p:grpSpPr>
           <p:cxnSp>
@@ -23823,7 +25727,7 @@
               </p:nvSpPr>
               <p:spPr bwMode="auto">
                 <a:xfrm rot="0" flipH="0" flipV="0">
-                  <a:off x="2130534" y="856023"/>
+                  <a:off x="2130534" y="856022"/>
                   <a:ext cx="481567" cy="481567"/>
                 </a:xfrm>
                 <a:prstGeom prst="ellipse">
